--- a/folder/folder-prof-corujao-editavel.pptx
+++ b/folder/folder-prof-corujao-editavel.pptx
@@ -1107,7 +1107,7 @@
         </p:nvSpPr>
         <p:spPr>
           <a:xfrm>
-            <a:off x="256032" y="1316736"/>
+            <a:off x="256032" y="1371600"/>
             <a:ext cx="3051936" cy="914400"/>
           </a:xfrm>
           <a:prstGeom prst="rect">
@@ -1189,7 +1189,7 @@
         </p:nvSpPr>
         <p:spPr>
           <a:xfrm rot="-72000">
-            <a:off x="210312" y="2276856"/>
+            <a:off x="210312" y="2331720"/>
             <a:ext cx="3143376" cy="310896"/>
           </a:xfrm>
           <a:prstGeom prst="roundRect">
@@ -1243,7 +1243,7 @@
         </p:nvSpPr>
         <p:spPr>
           <a:xfrm>
-            <a:off x="256032" y="2752344"/>
+            <a:off x="256032" y="2834640"/>
             <a:ext cx="3051936" cy="201168"/>
           </a:xfrm>
           <a:prstGeom prst="rect">
@@ -1268,7 +1268,7 @@
                 <a:ea typeface="Calibri" pitchFamily="34" charset="-122"/>
                 <a:cs typeface="Calibri" pitchFamily="34" charset="-120"/>
               </a:rPr>
-              <a:t>A VIRADA</a:t>
+              <a:t>O QUE É O PROF. CORUJÃO</a:t>
             </a:r>
             <a:endParaRPr lang="en-US" sz="900" dirty="0"/>
           </a:p>
@@ -1282,7 +1282,7 @@
         </p:nvSpPr>
         <p:spPr>
           <a:xfrm>
-            <a:off x="256032" y="2990088"/>
+            <a:off x="256032" y="3072384"/>
             <a:ext cx="3051936" cy="256032"/>
           </a:xfrm>
           <a:prstGeom prst="rect">
@@ -1324,7 +1324,7 @@
         </p:nvSpPr>
         <p:spPr>
           <a:xfrm>
-            <a:off x="256032" y="3264408"/>
+            <a:off x="256032" y="3346704"/>
             <a:ext cx="3051936" cy="256032"/>
           </a:xfrm>
           <a:prstGeom prst="rect">
@@ -1366,7 +1366,7 @@
         </p:nvSpPr>
         <p:spPr>
           <a:xfrm rot="180000">
-            <a:off x="256032" y="3557016"/>
+            <a:off x="256032" y="3639312"/>
             <a:ext cx="1280160" cy="329184"/>
           </a:xfrm>
           <a:prstGeom prst="roundRect">
@@ -1414,18 +1414,60 @@
       </p:sp>
       <p:sp>
         <p:nvSpPr>
-          <p:cNvPr id="11" name="Shape 9"/>
-          <p:cNvSpPr/>
-          <p:nvPr/>
-        </p:nvSpPr>
-        <p:spPr>
-          <a:xfrm>
-            <a:off x="256032" y="3995928"/>
-            <a:ext cx="3051936" cy="1417320"/>
+          <p:cNvPr id="11" name="Text 9"/>
+          <p:cNvSpPr/>
+          <p:nvPr/>
+        </p:nvSpPr>
+        <p:spPr>
+          <a:xfrm>
+            <a:off x="256032" y="4096512"/>
+            <a:ext cx="3051936" cy="548640"/>
+          </a:xfrm>
+          <a:prstGeom prst="rect">
+            <a:avLst/>
+          </a:prstGeom>
+          <a:noFill/>
+          <a:ln/>
+        </p:spPr>
+        <p:txBody>
+          <a:bodyPr wrap="square" lIns="0" tIns="0" rIns="0" bIns="0" rtlCol="0" anchor="t"/>
+          <a:lstStyle/>
+          <a:p>
+            <a:pPr indent="0" marL="0">
+              <a:lnSpc>
+                <a:spcPts val="1283"/>
+              </a:lnSpc>
+              <a:buNone/>
+            </a:pPr>
+            <a:r>
+              <a:rPr lang="en-US" sz="950" dirty="0">
+                <a:solidFill>
+                  <a:srgbClr val="5B6070"/>
+                </a:solidFill>
+                <a:latin typeface="Calibri" pitchFamily="34" charset="0"/>
+                <a:ea typeface="Calibri" pitchFamily="34" charset="-122"/>
+                <a:cs typeface="Calibri" pitchFamily="34" charset="-120"/>
+              </a:rPr>
+              <a:t>É um site. Você abre no celular ou no computador, escreve o tema da aula em uma linha e recebe o material pronto para revisar, imprimir ou projetar.</a:t>
+            </a:r>
+            <a:endParaRPr lang="en-US" sz="950" dirty="0"/>
+          </a:p>
+        </p:txBody>
+      </p:sp>
+      <p:sp>
+        <p:nvSpPr>
+          <p:cNvPr id="12" name="Shape 10"/>
+          <p:cNvSpPr/>
+          <p:nvPr/>
+        </p:nvSpPr>
+        <p:spPr>
+          <a:xfrm>
+            <a:off x="256032" y="4663440"/>
+            <a:ext cx="3051936" cy="1371600"/>
           </a:xfrm>
           <a:prstGeom prst="roundRect">
             <a:avLst>
-              <a:gd name="adj" fmla="val 3871"/>
+              <a:gd name="adj" fmla="val 4000"/>
             </a:avLst>
           </a:prstGeom>
           <a:solidFill>
@@ -1436,13 +1478,13 @@
       </p:sp>
       <p:sp>
         <p:nvSpPr>
-          <p:cNvPr id="12" name="Text 10"/>
-          <p:cNvSpPr/>
-          <p:nvPr/>
-        </p:nvSpPr>
-        <p:spPr>
-          <a:xfrm>
-            <a:off x="374904" y="4087368"/>
+          <p:cNvPr id="13" name="Text 11"/>
+          <p:cNvSpPr/>
+          <p:nvPr/>
+        </p:nvSpPr>
+        <p:spPr>
+          <a:xfrm>
+            <a:off x="374904" y="4745736"/>
             <a:ext cx="2814192" cy="146304"/>
           </a:xfrm>
           <a:prstGeom prst="rect">
@@ -1475,18 +1517,18 @@
       </p:sp>
       <p:sp>
         <p:nvSpPr>
-          <p:cNvPr id="13" name="Text 11"/>
-          <p:cNvSpPr/>
-          <p:nvPr/>
-        </p:nvSpPr>
-        <p:spPr>
-          <a:xfrm>
-            <a:off x="374904" y="4242816"/>
-            <a:ext cx="2814192" cy="256032"/>
+          <p:cNvPr id="14" name="Text 12"/>
+          <p:cNvSpPr/>
+          <p:nvPr/>
+        </p:nvSpPr>
+        <p:spPr>
+          <a:xfrm>
+            <a:off x="374904" y="4901184"/>
+            <a:ext cx="2814192" cy="237744"/>
           </a:xfrm>
           <a:prstGeom prst="roundRect">
             <a:avLst>
-              <a:gd name="adj" fmla="val 28571"/>
+              <a:gd name="adj" fmla="val 30769"/>
             </a:avLst>
           </a:prstGeom>
           <a:solidFill>
@@ -1518,13 +1560,13 @@
       </p:sp>
       <p:sp>
         <p:nvSpPr>
-          <p:cNvPr id="14" name="Text 12"/>
-          <p:cNvSpPr/>
-          <p:nvPr/>
-        </p:nvSpPr>
-        <p:spPr>
-          <a:xfrm>
-            <a:off x="374904" y="4544568"/>
+          <p:cNvPr id="15" name="Text 13"/>
+          <p:cNvSpPr/>
+          <p:nvPr/>
+        </p:nvSpPr>
+        <p:spPr>
+          <a:xfrm>
+            <a:off x="374904" y="5184648"/>
             <a:ext cx="2814192" cy="146304"/>
           </a:xfrm>
           <a:prstGeom prst="rect">
@@ -1557,14 +1599,14 @@
       </p:sp>
       <p:sp>
         <p:nvSpPr>
-          <p:cNvPr id="15" name="Text 13"/>
-          <p:cNvSpPr/>
-          <p:nvPr/>
-        </p:nvSpPr>
-        <p:spPr>
-          <a:xfrm>
-            <a:off x="374904" y="4709160"/>
-            <a:ext cx="2814192" cy="640080"/>
+          <p:cNvPr id="16" name="Text 14"/>
+          <p:cNvSpPr/>
+          <p:nvPr/>
+        </p:nvSpPr>
+        <p:spPr>
+          <a:xfrm>
+            <a:off x="374904" y="5349240"/>
+            <a:ext cx="2814192" cy="621792"/>
           </a:xfrm>
           <a:prstGeom prst="rect">
             <a:avLst/>
@@ -1591,7 +1633,7 @@
                 <a:ea typeface="Calibri" pitchFamily="34" charset="-122"/>
                 <a:cs typeface="Calibri" pitchFamily="34" charset="-120"/>
               </a:rPr>
-              <a:t>✓ Plano completo, com as habilidades da BNCC conferidas uma a uma</a:t>
+              <a:t>✓ Plano de aula completo, com as habilidades da BNCC</a:t>
             </a:r>
             <a:endParaRPr lang="en-US" sz="830" dirty="0"/>
           </a:p>
@@ -1611,7 +1653,7 @@
                 <a:ea typeface="Calibri" pitchFamily="34" charset="-122"/>
                 <a:cs typeface="Calibri" pitchFamily="34" charset="-120"/>
               </a:rPr>
-              <a:t>✓ Prova com gabarito e atividade pronta para imprimir</a:t>
+              <a:t>✓ Prova com gabarito e atividade para imprimir</a:t>
             </a:r>
             <a:endParaRPr lang="en-US" sz="830" dirty="0"/>
           </a:p>
@@ -1631,7 +1673,7 @@
                 <a:ea typeface="Calibri" pitchFamily="34" charset="-122"/>
                 <a:cs typeface="Calibri" pitchFamily="34" charset="-120"/>
               </a:rPr>
-              <a:t>✓ Slides com imagens, exportáveis em PowerPoint</a:t>
+              <a:t>✓ Slides prontos para projetar</a:t>
             </a:r>
             <a:endParaRPr lang="en-US" sz="830" dirty="0"/>
           </a:p>
@@ -1659,18 +1701,72 @@
       </p:sp>
       <p:sp>
         <p:nvSpPr>
-          <p:cNvPr id="16" name="Shape 14"/>
-          <p:cNvSpPr/>
-          <p:nvPr/>
-        </p:nvSpPr>
-        <p:spPr>
-          <a:xfrm>
-            <a:off x="256032" y="5541264"/>
-            <a:ext cx="968544" cy="566928"/>
+          <p:cNvPr id="17" name="Text 15"/>
+          <p:cNvSpPr/>
+          <p:nvPr/>
+        </p:nvSpPr>
+        <p:spPr>
+          <a:xfrm rot="-120000">
+            <a:off x="256032" y="6535872"/>
+            <a:ext cx="3051936" cy="237744"/>
           </a:xfrm>
           <a:prstGeom prst="roundRect">
             <a:avLst>
-              <a:gd name="adj" fmla="val 8065"/>
+              <a:gd name="adj" fmla="val 153846"/>
+            </a:avLst>
+          </a:prstGeom>
+          <a:solidFill>
+            <a:srgbClr val="10B981"/>
+          </a:solidFill>
+          <a:ln w="25400">
+            <a:solidFill>
+              <a:srgbClr val="063A28"/>
+            </a:solidFill>
+          </a:ln>
+          <a:effectLst>
+            <a:outerShdw sx="100000" sy="100000" kx="0" ky="0" algn="bl" rotWithShape="0" blurRad="101600" dist="63500" dir="2700000">
+              <a:srgbClr val="063A28">
+                <a:alpha val="90000"/>
+              </a:srgbClr>
+            </a:outerShdw>
+          </a:effectLst>
+        </p:spPr>
+        <p:txBody>
+          <a:bodyPr wrap="square" lIns="381" tIns="381" rIns="381" bIns="381" rtlCol="0" anchor="ctr"/>
+          <a:lstStyle/>
+          <a:p>
+            <a:pPr algn="ctr" indent="0" marL="0">
+              <a:buNone/>
+            </a:pPr>
+            <a:r>
+              <a:rPr lang="en-US" sz="950" b="1" spc="100" kern="0" dirty="0">
+                <a:solidFill>
+                  <a:srgbClr val="063A28"/>
+                </a:solidFill>
+                <a:latin typeface="Calibri" pitchFamily="34" charset="0"/>
+                <a:ea typeface="Calibri" pitchFamily="34" charset="-122"/>
+                <a:cs typeface="Calibri" pitchFamily="34" charset="-120"/>
+              </a:rPr>
+              <a:t>NÃO PRECISA SABER MEXER COM TECNOLOGIA</a:t>
+            </a:r>
+            <a:endParaRPr lang="en-US" sz="950" dirty="0"/>
+          </a:p>
+        </p:txBody>
+      </p:sp>
+      <p:sp>
+        <p:nvSpPr>
+          <p:cNvPr id="18" name="Shape 16"/>
+          <p:cNvSpPr/>
+          <p:nvPr/>
+        </p:nvSpPr>
+        <p:spPr>
+          <a:xfrm>
+            <a:off x="256032" y="6865056"/>
+            <a:ext cx="968544" cy="548640"/>
+          </a:xfrm>
+          <a:prstGeom prst="roundRect">
+            <a:avLst>
+              <a:gd name="adj" fmla="val 8333"/>
             </a:avLst>
           </a:prstGeom>
           <a:solidFill>
@@ -1686,14 +1782,14 @@
       </p:sp>
       <p:sp>
         <p:nvSpPr>
-          <p:cNvPr id="17" name="Text 15"/>
-          <p:cNvSpPr/>
-          <p:nvPr/>
-        </p:nvSpPr>
-        <p:spPr>
-          <a:xfrm>
-            <a:off x="256032" y="5586984"/>
-            <a:ext cx="968544" cy="311810"/>
+          <p:cNvPr id="19" name="Text 17"/>
+          <p:cNvSpPr/>
+          <p:nvPr/>
+        </p:nvSpPr>
+        <p:spPr>
+          <a:xfrm>
+            <a:off x="256032" y="6910776"/>
+            <a:ext cx="968544" cy="301752"/>
           </a:xfrm>
           <a:prstGeom prst="rect">
             <a:avLst/>
@@ -1725,14 +1821,14 @@
       </p:sp>
       <p:sp>
         <p:nvSpPr>
-          <p:cNvPr id="18" name="Text 16"/>
-          <p:cNvSpPr/>
-          <p:nvPr/>
-        </p:nvSpPr>
-        <p:spPr>
-          <a:xfrm>
-            <a:off x="292608" y="5870082"/>
-            <a:ext cx="895392" cy="226771"/>
+          <p:cNvPr id="20" name="Text 18"/>
+          <p:cNvSpPr/>
+          <p:nvPr/>
+        </p:nvSpPr>
+        <p:spPr>
+          <a:xfrm>
+            <a:off x="292608" y="7183267"/>
+            <a:ext cx="895392" cy="219456"/>
           </a:xfrm>
           <a:prstGeom prst="rect">
             <a:avLst/>
@@ -1787,18 +1883,18 @@
       </p:sp>
       <p:sp>
         <p:nvSpPr>
-          <p:cNvPr id="19" name="Shape 17"/>
-          <p:cNvSpPr/>
-          <p:nvPr/>
-        </p:nvSpPr>
-        <p:spPr>
-          <a:xfrm>
-            <a:off x="1297728" y="5541264"/>
-            <a:ext cx="968544" cy="566928"/>
+          <p:cNvPr id="21" name="Shape 19"/>
+          <p:cNvSpPr/>
+          <p:nvPr/>
+        </p:nvSpPr>
+        <p:spPr>
+          <a:xfrm>
+            <a:off x="1297728" y="6865056"/>
+            <a:ext cx="968544" cy="548640"/>
           </a:xfrm>
           <a:prstGeom prst="roundRect">
             <a:avLst>
-              <a:gd name="adj" fmla="val 8065"/>
+              <a:gd name="adj" fmla="val 8333"/>
             </a:avLst>
           </a:prstGeom>
           <a:solidFill>
@@ -1814,14 +1910,14 @@
       </p:sp>
       <p:sp>
         <p:nvSpPr>
-          <p:cNvPr id="20" name="Text 18"/>
-          <p:cNvSpPr/>
-          <p:nvPr/>
-        </p:nvSpPr>
-        <p:spPr>
-          <a:xfrm>
-            <a:off x="1297728" y="5586984"/>
-            <a:ext cx="968544" cy="311810"/>
+          <p:cNvPr id="22" name="Text 20"/>
+          <p:cNvSpPr/>
+          <p:nvPr/>
+        </p:nvSpPr>
+        <p:spPr>
+          <a:xfrm>
+            <a:off x="1297728" y="6910776"/>
+            <a:ext cx="968544" cy="301752"/>
           </a:xfrm>
           <a:prstGeom prst="rect">
             <a:avLst/>
@@ -1853,14 +1949,14 @@
       </p:sp>
       <p:sp>
         <p:nvSpPr>
-          <p:cNvPr id="21" name="Text 19"/>
-          <p:cNvSpPr/>
-          <p:nvPr/>
-        </p:nvSpPr>
-        <p:spPr>
-          <a:xfrm>
-            <a:off x="1334304" y="5870082"/>
-            <a:ext cx="895392" cy="226771"/>
+          <p:cNvPr id="23" name="Text 21"/>
+          <p:cNvSpPr/>
+          <p:nvPr/>
+        </p:nvSpPr>
+        <p:spPr>
+          <a:xfrm>
+            <a:off x="1334304" y="7183267"/>
+            <a:ext cx="895392" cy="219456"/>
           </a:xfrm>
           <a:prstGeom prst="rect">
             <a:avLst/>
@@ -1887,7 +1983,7 @@
                 <a:ea typeface="Calibri" pitchFamily="34" charset="-122"/>
                 <a:cs typeface="Calibri" pitchFamily="34" charset="-120"/>
               </a:rPr>
-              <a:t>jogos</a:t>
+              <a:t>tipos</a:t>
             </a:r>
             <a:endParaRPr lang="en-US" sz="700" dirty="0"/>
           </a:p>
@@ -1907,7 +2003,7 @@
                 <a:ea typeface="Calibri" pitchFamily="34" charset="-122"/>
                 <a:cs typeface="Calibri" pitchFamily="34" charset="-120"/>
               </a:rPr>
-              <a:t>com IA</a:t>
+              <a:t>de jogo</a:t>
             </a:r>
             <a:endParaRPr lang="en-US" sz="700" dirty="0"/>
           </a:p>
@@ -1915,18 +2011,18 @@
       </p:sp>
       <p:sp>
         <p:nvSpPr>
-          <p:cNvPr id="22" name="Shape 20"/>
-          <p:cNvSpPr/>
-          <p:nvPr/>
-        </p:nvSpPr>
-        <p:spPr>
-          <a:xfrm>
-            <a:off x="2339424" y="5541264"/>
-            <a:ext cx="968544" cy="566928"/>
+          <p:cNvPr id="24" name="Shape 22"/>
+          <p:cNvSpPr/>
+          <p:nvPr/>
+        </p:nvSpPr>
+        <p:spPr>
+          <a:xfrm>
+            <a:off x="2339424" y="6865056"/>
+            <a:ext cx="968544" cy="548640"/>
           </a:xfrm>
           <a:prstGeom prst="roundRect">
             <a:avLst>
-              <a:gd name="adj" fmla="val 8065"/>
+              <a:gd name="adj" fmla="val 8333"/>
             </a:avLst>
           </a:prstGeom>
           <a:solidFill>
@@ -1942,14 +2038,14 @@
       </p:sp>
       <p:sp>
         <p:nvSpPr>
-          <p:cNvPr id="23" name="Text 21"/>
-          <p:cNvSpPr/>
-          <p:nvPr/>
-        </p:nvSpPr>
-        <p:spPr>
-          <a:xfrm>
-            <a:off x="2339424" y="5586984"/>
-            <a:ext cx="968544" cy="311810"/>
+          <p:cNvPr id="25" name="Text 23"/>
+          <p:cNvSpPr/>
+          <p:nvPr/>
+        </p:nvSpPr>
+        <p:spPr>
+          <a:xfrm>
+            <a:off x="2339424" y="6910776"/>
+            <a:ext cx="968544" cy="301752"/>
           </a:xfrm>
           <a:prstGeom prst="rect">
             <a:avLst/>
@@ -1981,14 +2077,14 @@
       </p:sp>
       <p:sp>
         <p:nvSpPr>
-          <p:cNvPr id="24" name="Text 22"/>
-          <p:cNvSpPr/>
-          <p:nvPr/>
-        </p:nvSpPr>
-        <p:spPr>
-          <a:xfrm>
-            <a:off x="2376000" y="5870082"/>
-            <a:ext cx="895392" cy="226771"/>
+          <p:cNvPr id="26" name="Text 24"/>
+          <p:cNvSpPr/>
+          <p:nvPr/>
+        </p:nvSpPr>
+        <p:spPr>
+          <a:xfrm>
+            <a:off x="2376000" y="7183267"/>
+            <a:ext cx="895392" cy="219456"/>
           </a:xfrm>
           <a:prstGeom prst="rect">
             <a:avLst/>
@@ -2043,7 +2139,7 @@
       </p:sp>
       <p:sp>
         <p:nvSpPr>
-          <p:cNvPr id="25" name="Shape 23"/>
+          <p:cNvPr id="27" name="Shape 25"/>
           <p:cNvSpPr/>
           <p:nvPr/>
         </p:nvSpPr>
@@ -2063,7 +2159,7 @@
       </p:sp>
       <p:pic>
         <p:nvPicPr>
-          <p:cNvPr id="26" name="Image 0" descr="/home/user/Site/folder/pptx/assets/logo.png">    </p:cNvPr>
+          <p:cNvPr id="28" name="Image 0" descr="/home/user/Site/folder/pptx/assets/logo.png">    </p:cNvPr>
           <p:cNvPicPr>
             <a:picLocks noChangeAspect="1"/>
           </p:cNvPicPr>
@@ -2087,7 +2183,7 @@
       </p:pic>
       <p:sp>
         <p:nvSpPr>
-          <p:cNvPr id="27" name="Text 24"/>
+          <p:cNvPr id="29" name="Text 26"/>
           <p:cNvSpPr/>
           <p:nvPr/>
         </p:nvSpPr>
@@ -2126,13 +2222,13 @@
       </p:sp>
       <p:sp>
         <p:nvSpPr>
-          <p:cNvPr id="28" name="Text 25"/>
-          <p:cNvSpPr/>
-          <p:nvPr/>
-        </p:nvSpPr>
-        <p:spPr>
-          <a:xfrm>
-            <a:off x="3820032" y="731520"/>
+          <p:cNvPr id="30" name="Text 27"/>
+          <p:cNvSpPr/>
+          <p:nvPr/>
+        </p:nvSpPr>
+        <p:spPr>
+          <a:xfrm>
+            <a:off x="3820032" y="749808"/>
             <a:ext cx="3051936" cy="201168"/>
           </a:xfrm>
           <a:prstGeom prst="rect">
@@ -2165,14 +2261,14 @@
       </p:sp>
       <p:sp>
         <p:nvSpPr>
-          <p:cNvPr id="29" name="Text 26"/>
-          <p:cNvSpPr/>
-          <p:nvPr/>
-        </p:nvSpPr>
-        <p:spPr>
-          <a:xfrm>
-            <a:off x="3820032" y="969264"/>
-            <a:ext cx="3051936" cy="502920"/>
+          <p:cNvPr id="31" name="Text 28"/>
+          <p:cNvSpPr/>
+          <p:nvPr/>
+        </p:nvSpPr>
+        <p:spPr>
+          <a:xfrm>
+            <a:off x="3820032" y="987552"/>
+            <a:ext cx="3051936" cy="256032"/>
           </a:xfrm>
           <a:prstGeom prst="rect">
             <a:avLst/>
@@ -2199,8 +2295,33 @@
                 <a:ea typeface="Cambria" pitchFamily="34" charset="-122"/>
                 <a:cs typeface="Cambria" pitchFamily="34" charset="-120"/>
               </a:rPr>
-              <a:t>Teste sete dias. Depois você </a:t>
-            </a:r>
+              <a:t>Teste sete dias.</a:t>
+            </a:r>
+            <a:endParaRPr lang="en-US" sz="1500" dirty="0"/>
+          </a:p>
+        </p:txBody>
+      </p:sp>
+      <p:sp>
+        <p:nvSpPr>
+          <p:cNvPr id="32" name="Text 29"/>
+          <p:cNvSpPr/>
+          <p:nvPr/>
+        </p:nvSpPr>
+        <p:spPr>
+          <a:xfrm>
+            <a:off x="3820032" y="1261872"/>
+            <a:ext cx="3051936" cy="256032"/>
+          </a:xfrm>
+          <a:prstGeom prst="rect">
+            <a:avLst/>
+          </a:prstGeom>
+          <a:noFill/>
+          <a:ln/>
+        </p:spPr>
+        <p:txBody>
+          <a:bodyPr wrap="square" lIns="0" tIns="0" rIns="0" bIns="0" rtlCol="0" anchor="ctr"/>
+          <a:lstStyle/>
+          <a:p>
             <a:pPr indent="0" marL="0">
               <a:lnSpc>
                 <a:spcPts val="1620"/>
@@ -2210,27 +2331,81 @@
             <a:r>
               <a:rPr lang="en-US" sz="1500" b="1" dirty="0">
                 <a:solidFill>
-                  <a:srgbClr val="F5C842"/>
+                  <a:srgbClr val="FFFFFF"/>
                 </a:solidFill>
                 <a:latin typeface="Cambria" pitchFamily="34" charset="0"/>
                 <a:ea typeface="Cambria" pitchFamily="34" charset="-122"/>
                 <a:cs typeface="Cambria" pitchFamily="34" charset="-120"/>
               </a:rPr>
+              <a:t>Depois você</a:t>
+            </a:r>
+            <a:endParaRPr lang="en-US" sz="1500" dirty="0"/>
+          </a:p>
+        </p:txBody>
+      </p:sp>
+      <p:sp>
+        <p:nvSpPr>
+          <p:cNvPr id="33" name="Text 30"/>
+          <p:cNvSpPr/>
+          <p:nvPr/>
+        </p:nvSpPr>
+        <p:spPr>
+          <a:xfrm rot="120000">
+            <a:off x="3820032" y="1554480"/>
+            <a:ext cx="1188720" cy="329184"/>
+          </a:xfrm>
+          <a:prstGeom prst="roundRect">
+            <a:avLst>
+              <a:gd name="adj" fmla="val 22222"/>
+            </a:avLst>
+          </a:prstGeom>
+          <a:solidFill>
+            <a:srgbClr val="F5C842"/>
+          </a:solidFill>
+          <a:ln w="31750">
+            <a:solidFill>
+              <a:srgbClr val="180E4E"/>
+            </a:solidFill>
+          </a:ln>
+          <a:effectLst>
+            <a:outerShdw sx="100000" sy="100000" kx="0" ky="0" algn="bl" rotWithShape="0" blurRad="101600" dist="63500" dir="2700000">
+              <a:srgbClr val="000000">
+                <a:alpha val="85000"/>
+              </a:srgbClr>
+            </a:outerShdw>
+          </a:effectLst>
+        </p:spPr>
+        <p:txBody>
+          <a:bodyPr wrap="square" lIns="508" tIns="508" rIns="508" bIns="508" rtlCol="0" anchor="ctr"/>
+          <a:lstStyle/>
+          <a:p>
+            <a:pPr algn="ctr" indent="0" marL="0">
+              <a:buNone/>
+            </a:pPr>
+            <a:r>
+              <a:rPr lang="en-US" sz="1300" b="1" dirty="0">
+                <a:solidFill>
+                  <a:srgbClr val="180E4E"/>
+                </a:solidFill>
+                <a:latin typeface="Cambria" pitchFamily="34" charset="0"/>
+                <a:ea typeface="Cambria" pitchFamily="34" charset="-122"/>
+                <a:cs typeface="Cambria" pitchFamily="34" charset="-120"/>
+              </a:rPr>
               <a:t>decide.</a:t>
             </a:r>
-            <a:endParaRPr lang="en-US" sz="1500" dirty="0"/>
-          </a:p>
-        </p:txBody>
-      </p:sp>
-      <p:sp>
-        <p:nvSpPr>
-          <p:cNvPr id="30" name="Text 27"/>
-          <p:cNvSpPr/>
-          <p:nvPr/>
-        </p:nvSpPr>
-        <p:spPr>
-          <a:xfrm>
-            <a:off x="3820032" y="1536192"/>
+            <a:endParaRPr lang="en-US" sz="1300" dirty="0"/>
+          </a:p>
+        </p:txBody>
+      </p:sp>
+      <p:sp>
+        <p:nvSpPr>
+          <p:cNvPr id="34" name="Text 31"/>
+          <p:cNvSpPr/>
+          <p:nvPr/>
+        </p:nvSpPr>
+        <p:spPr>
+          <a:xfrm>
+            <a:off x="3820032" y="2029968"/>
             <a:ext cx="3051936" cy="502920"/>
           </a:xfrm>
           <a:prstGeom prst="rect">
@@ -2258,7 +2433,7 @@
                 <a:ea typeface="Calibri" pitchFamily="34" charset="-122"/>
                 <a:cs typeface="Calibri" pitchFamily="34" charset="-120"/>
               </a:rPr>
-              <a:t>Criação ilimitada por sete dias, sem cartão. Passado o prazo, o material que você já criou continua seu.</a:t>
+              <a:t>Sete dias criando quanto quiser, sem cartão de crédito. Passado o prazo, o material que você já criou continua seu.</a:t>
             </a:r>
             <a:endParaRPr lang="en-US" sz="900" dirty="0"/>
           </a:p>
@@ -2266,18 +2441,18 @@
       </p:sp>
       <p:sp>
         <p:nvSpPr>
-          <p:cNvPr id="31" name="Shape 28"/>
-          <p:cNvSpPr/>
-          <p:nvPr/>
-        </p:nvSpPr>
-        <p:spPr>
-          <a:xfrm>
-            <a:off x="3820032" y="2066544"/>
-            <a:ext cx="3051936" cy="566928"/>
+          <p:cNvPr id="35" name="Shape 32"/>
+          <p:cNvSpPr/>
+          <p:nvPr/>
+        </p:nvSpPr>
+        <p:spPr>
+          <a:xfrm>
+            <a:off x="3820032" y="2578608"/>
+            <a:ext cx="3051936" cy="548640"/>
           </a:xfrm>
           <a:prstGeom prst="roundRect">
             <a:avLst>
-              <a:gd name="adj" fmla="val 9677"/>
+              <a:gd name="adj" fmla="val 10000"/>
             </a:avLst>
           </a:prstGeom>
           <a:solidFill>
@@ -2297,13 +2472,13 @@
       </p:sp>
       <p:sp>
         <p:nvSpPr>
-          <p:cNvPr id="32" name="Text 29"/>
-          <p:cNvSpPr/>
-          <p:nvPr/>
-        </p:nvSpPr>
-        <p:spPr>
-          <a:xfrm>
-            <a:off x="3929760" y="2130552"/>
+          <p:cNvPr id="36" name="Text 33"/>
+          <p:cNvSpPr/>
+          <p:nvPr/>
+        </p:nvSpPr>
+        <p:spPr>
+          <a:xfrm>
+            <a:off x="3929760" y="2642616"/>
             <a:ext cx="2832480" cy="164592"/>
           </a:xfrm>
           <a:prstGeom prst="rect">
@@ -2336,13 +2511,13 @@
       </p:sp>
       <p:sp>
         <p:nvSpPr>
-          <p:cNvPr id="33" name="Text 30"/>
-          <p:cNvSpPr/>
-          <p:nvPr/>
-        </p:nvSpPr>
-        <p:spPr>
-          <a:xfrm>
-            <a:off x="3929760" y="2286000"/>
+          <p:cNvPr id="37" name="Text 34"/>
+          <p:cNvSpPr/>
+          <p:nvPr/>
+        </p:nvSpPr>
+        <p:spPr>
+          <a:xfrm>
+            <a:off x="3929760" y="2798064"/>
             <a:ext cx="2832480" cy="292608"/>
           </a:xfrm>
           <a:prstGeom prst="rect">
@@ -2375,14 +2550,14 @@
       </p:sp>
       <p:sp>
         <p:nvSpPr>
-          <p:cNvPr id="34" name="Text 31"/>
-          <p:cNvSpPr/>
-          <p:nvPr/>
-        </p:nvSpPr>
-        <p:spPr>
-          <a:xfrm>
-            <a:off x="3929760" y="2578608"/>
-            <a:ext cx="2832480" cy="0"/>
+          <p:cNvPr id="38" name="Text 35"/>
+          <p:cNvSpPr/>
+          <p:nvPr/>
+        </p:nvSpPr>
+        <p:spPr>
+          <a:xfrm>
+            <a:off x="3929760" y="3090672"/>
+            <a:ext cx="2832480" cy="-18288"/>
           </a:xfrm>
           <a:prstGeom prst="rect">
             <a:avLst/>
@@ -2417,13 +2592,13 @@
       </p:sp>
       <p:sp>
         <p:nvSpPr>
-          <p:cNvPr id="35" name="Shape 32"/>
-          <p:cNvSpPr/>
-          <p:nvPr/>
-        </p:nvSpPr>
-        <p:spPr>
-          <a:xfrm>
-            <a:off x="3820032" y="2706624"/>
+          <p:cNvPr id="39" name="Shape 36"/>
+          <p:cNvSpPr/>
+          <p:nvPr/>
+        </p:nvSpPr>
+        <p:spPr>
+          <a:xfrm>
+            <a:off x="3820032" y="3200400"/>
             <a:ext cx="3051936" cy="658368"/>
           </a:xfrm>
           <a:prstGeom prst="roundRect">
@@ -2451,13 +2626,13 @@
       </p:sp>
       <p:sp>
         <p:nvSpPr>
-          <p:cNvPr id="36" name="Text 33"/>
-          <p:cNvSpPr/>
-          <p:nvPr/>
-        </p:nvSpPr>
-        <p:spPr>
-          <a:xfrm>
-            <a:off x="3929760" y="2770632"/>
+          <p:cNvPr id="40" name="Text 37"/>
+          <p:cNvSpPr/>
+          <p:nvPr/>
+        </p:nvSpPr>
+        <p:spPr>
+          <a:xfrm>
+            <a:off x="3929760" y="3264408"/>
             <a:ext cx="2832480" cy="164592"/>
           </a:xfrm>
           <a:prstGeom prst="rect">
@@ -2490,13 +2665,13 @@
       </p:sp>
       <p:sp>
         <p:nvSpPr>
-          <p:cNvPr id="37" name="Text 34"/>
-          <p:cNvSpPr/>
-          <p:nvPr/>
-        </p:nvSpPr>
-        <p:spPr>
-          <a:xfrm>
-            <a:off x="3929760" y="2926080"/>
+          <p:cNvPr id="41" name="Text 38"/>
+          <p:cNvSpPr/>
+          <p:nvPr/>
+        </p:nvSpPr>
+        <p:spPr>
+          <a:xfrm>
+            <a:off x="3929760" y="3419856"/>
             <a:ext cx="2832480" cy="292608"/>
           </a:xfrm>
           <a:prstGeom prst="rect">
@@ -2529,13 +2704,13 @@
       </p:sp>
       <p:sp>
         <p:nvSpPr>
-          <p:cNvPr id="38" name="Text 35"/>
-          <p:cNvSpPr/>
-          <p:nvPr/>
-        </p:nvSpPr>
-        <p:spPr>
-          <a:xfrm>
-            <a:off x="3929760" y="3218688"/>
+          <p:cNvPr id="42" name="Text 39"/>
+          <p:cNvSpPr/>
+          <p:nvPr/>
+        </p:nvSpPr>
+        <p:spPr>
+          <a:xfrm>
+            <a:off x="3929760" y="3712464"/>
             <a:ext cx="2832480" cy="91440"/>
           </a:xfrm>
           <a:prstGeom prst="rect">
@@ -2571,13 +2746,13 @@
       </p:sp>
       <p:sp>
         <p:nvSpPr>
-          <p:cNvPr id="39" name="Shape 36"/>
-          <p:cNvSpPr/>
-          <p:nvPr/>
-        </p:nvSpPr>
-        <p:spPr>
-          <a:xfrm>
-            <a:off x="3820032" y="3456432"/>
+          <p:cNvPr id="43" name="Shape 40"/>
+          <p:cNvSpPr/>
+          <p:nvPr/>
+        </p:nvSpPr>
+        <p:spPr>
+          <a:xfrm>
+            <a:off x="3820032" y="3950208"/>
             <a:ext cx="3051936" cy="713232"/>
           </a:xfrm>
           <a:prstGeom prst="roundRect">
@@ -2605,7 +2780,7 @@
       </p:sp>
       <p:pic>
         <p:nvPicPr>
-          <p:cNvPr id="40" name="Image 1" descr="/home/user/Site/folder/pptx/assets/qr-app.png">    </p:cNvPr>
+          <p:cNvPr id="44" name="Image 1" descr="/home/user/Site/folder/pptx/assets/qr-app.png">    </p:cNvPr>
           <p:cNvPicPr>
             <a:picLocks noChangeAspect="1"/>
           </p:cNvPicPr>
@@ -2619,7 +2794,7 @@
         </p:blipFill>
         <p:spPr>
           <a:xfrm>
-            <a:off x="3893184" y="3529584"/>
+            <a:off x="3893184" y="4023360"/>
             <a:ext cx="566928" cy="566928"/>
           </a:xfrm>
           <a:prstGeom prst="rect">
@@ -2629,13 +2804,13 @@
       </p:pic>
       <p:sp>
         <p:nvSpPr>
-          <p:cNvPr id="41" name="Text 37"/>
-          <p:cNvSpPr/>
-          <p:nvPr/>
-        </p:nvSpPr>
-        <p:spPr>
-          <a:xfrm>
-            <a:off x="4551552" y="3511296"/>
+          <p:cNvPr id="45" name="Text 41"/>
+          <p:cNvSpPr/>
+          <p:nvPr/>
+        </p:nvSpPr>
+        <p:spPr>
+          <a:xfrm>
+            <a:off x="4551552" y="4005072"/>
             <a:ext cx="2228976" cy="310896"/>
           </a:xfrm>
           <a:prstGeom prst="rect">
@@ -2671,13 +2846,13 @@
       </p:sp>
       <p:sp>
         <p:nvSpPr>
-          <p:cNvPr id="42" name="Text 38"/>
-          <p:cNvSpPr/>
-          <p:nvPr/>
-        </p:nvSpPr>
-        <p:spPr>
-          <a:xfrm>
-            <a:off x="4551552" y="3840480"/>
+          <p:cNvPr id="46" name="Text 42"/>
+          <p:cNvSpPr/>
+          <p:nvPr/>
+        </p:nvSpPr>
+        <p:spPr>
+          <a:xfrm>
+            <a:off x="4551552" y="4334256"/>
             <a:ext cx="2228976" cy="155448"/>
           </a:xfrm>
           <a:prstGeom prst="rect">
@@ -2705,7 +2880,7 @@
                 <a:ea typeface="Calibri" pitchFamily="34" charset="-122"/>
                 <a:cs typeface="Calibri" pitchFamily="34" charset="-120"/>
               </a:rPr>
-              <a:t>Celular, tablet ou computador.</a:t>
+              <a:t>Cadastro com e-mail e senha, leva um minuto.</a:t>
             </a:r>
             <a:endParaRPr lang="en-US" sz="700" dirty="0"/>
           </a:p>
@@ -2713,13 +2888,13 @@
       </p:sp>
       <p:sp>
         <p:nvSpPr>
-          <p:cNvPr id="43" name="Text 39"/>
-          <p:cNvSpPr/>
-          <p:nvPr/>
-        </p:nvSpPr>
-        <p:spPr>
-          <a:xfrm>
-            <a:off x="4551552" y="4005072"/>
+          <p:cNvPr id="47" name="Text 43"/>
+          <p:cNvSpPr/>
+          <p:nvPr/>
+        </p:nvSpPr>
+        <p:spPr>
+          <a:xfrm>
+            <a:off x="4551552" y="4498848"/>
             <a:ext cx="2228976" cy="146304"/>
           </a:xfrm>
           <a:prstGeom prst="rect">
@@ -2752,13 +2927,13 @@
       </p:sp>
       <p:sp>
         <p:nvSpPr>
-          <p:cNvPr id="44" name="Shape 40"/>
-          <p:cNvSpPr/>
-          <p:nvPr/>
-        </p:nvSpPr>
-        <p:spPr>
-          <a:xfrm>
-            <a:off x="3820032" y="4242816"/>
+          <p:cNvPr id="48" name="Shape 44"/>
+          <p:cNvSpPr/>
+          <p:nvPr/>
+        </p:nvSpPr>
+        <p:spPr>
+          <a:xfrm>
+            <a:off x="3820032" y="4736592"/>
             <a:ext cx="3051936" cy="713232"/>
           </a:xfrm>
           <a:prstGeom prst="roundRect">
@@ -2786,7 +2961,7 @@
       </p:sp>
       <p:pic>
         <p:nvPicPr>
-          <p:cNvPr id="45" name="Image 2" descr="/home/user/Site/folder/pptx/assets/qr-whats.png">    </p:cNvPr>
+          <p:cNvPr id="49" name="Image 2" descr="/home/user/Site/folder/pptx/assets/qr-whats.png">    </p:cNvPr>
           <p:cNvPicPr>
             <a:picLocks noChangeAspect="1"/>
           </p:cNvPicPr>
@@ -2800,7 +2975,7 @@
         </p:blipFill>
         <p:spPr>
           <a:xfrm>
-            <a:off x="3893184" y="4315968"/>
+            <a:off x="3893184" y="4809744"/>
             <a:ext cx="566928" cy="566928"/>
           </a:xfrm>
           <a:prstGeom prst="rect">
@@ -2810,13 +2985,13 @@
       </p:pic>
       <p:sp>
         <p:nvSpPr>
-          <p:cNvPr id="46" name="Text 41"/>
-          <p:cNvSpPr/>
-          <p:nvPr/>
-        </p:nvSpPr>
-        <p:spPr>
-          <a:xfrm>
-            <a:off x="4551552" y="4297680"/>
+          <p:cNvPr id="50" name="Text 45"/>
+          <p:cNvSpPr/>
+          <p:nvPr/>
+        </p:nvSpPr>
+        <p:spPr>
+          <a:xfrm>
+            <a:off x="4551552" y="4791456"/>
             <a:ext cx="2228976" cy="310896"/>
           </a:xfrm>
           <a:prstGeom prst="rect">
@@ -2852,13 +3027,13 @@
       </p:sp>
       <p:sp>
         <p:nvSpPr>
-          <p:cNvPr id="47" name="Text 42"/>
-          <p:cNvSpPr/>
-          <p:nvPr/>
-        </p:nvSpPr>
-        <p:spPr>
-          <a:xfrm>
-            <a:off x="4551552" y="4626864"/>
+          <p:cNvPr id="51" name="Text 46"/>
+          <p:cNvSpPr/>
+          <p:nvPr/>
+        </p:nvSpPr>
+        <p:spPr>
+          <a:xfrm>
+            <a:off x="4551552" y="5120640"/>
             <a:ext cx="2228976" cy="155448"/>
           </a:xfrm>
           <a:prstGeom prst="rect">
@@ -2894,13 +3069,13 @@
       </p:sp>
       <p:sp>
         <p:nvSpPr>
-          <p:cNvPr id="48" name="Text 43"/>
-          <p:cNvSpPr/>
-          <p:nvPr/>
-        </p:nvSpPr>
-        <p:spPr>
-          <a:xfrm>
-            <a:off x="4551552" y="4791456"/>
+          <p:cNvPr id="52" name="Text 47"/>
+          <p:cNvSpPr/>
+          <p:nvPr/>
+        </p:nvSpPr>
+        <p:spPr>
+          <a:xfrm>
+            <a:off x="4551552" y="5285232"/>
             <a:ext cx="2228976" cy="146304"/>
           </a:xfrm>
           <a:prstGeom prst="rect">
@@ -2933,13 +3108,13 @@
       </p:sp>
       <p:sp>
         <p:nvSpPr>
-          <p:cNvPr id="49" name="Text 44"/>
+          <p:cNvPr id="53" name="Text 48"/>
           <p:cNvSpPr/>
           <p:nvPr/>
         </p:nvSpPr>
         <p:spPr>
           <a:xfrm rot="-120000">
-            <a:off x="3820032" y="5084064"/>
+            <a:off x="3820032" y="6417000"/>
             <a:ext cx="1828800" cy="219456"/>
           </a:xfrm>
           <a:prstGeom prst="roundRect">
@@ -2987,13 +3162,13 @@
       </p:sp>
       <p:sp>
         <p:nvSpPr>
-          <p:cNvPr id="50" name="Text 45"/>
-          <p:cNvSpPr/>
-          <p:nvPr/>
-        </p:nvSpPr>
-        <p:spPr>
-          <a:xfrm>
-            <a:off x="3820032" y="5376672"/>
+          <p:cNvPr id="54" name="Text 49"/>
+          <p:cNvSpPr/>
+          <p:nvPr/>
+        </p:nvSpPr>
+        <p:spPr>
+          <a:xfrm>
+            <a:off x="3820032" y="6709608"/>
             <a:ext cx="3051936" cy="457200"/>
           </a:xfrm>
           <a:prstGeom prst="rect">
@@ -3021,7 +3196,7 @@
                 <a:ea typeface="Calibri" pitchFamily="34" charset="-122"/>
                 <a:cs typeface="Calibri" pitchFamily="34" charset="-120"/>
               </a:rPr>
-              <a:t>Não é uma empresa. É um TCC. Construí o Prof. Corujão sozinho, para os professores que eu vi trabalhando até tarde com o que tinham.</a:t>
+              <a:t>Não é uma empresa. É um TCC. Construí o Prof. Corujão sozinho, para professores que eu vi trabalhando até tarde com o que tinham.</a:t>
             </a:r>
             <a:endParaRPr lang="en-US" sz="780" dirty="0"/>
           </a:p>
@@ -3049,13 +3224,13 @@
       </p:sp>
       <p:sp>
         <p:nvSpPr>
-          <p:cNvPr id="51" name="Text 46"/>
-          <p:cNvSpPr/>
-          <p:nvPr/>
-        </p:nvSpPr>
-        <p:spPr>
-          <a:xfrm>
-            <a:off x="3820032" y="5888736"/>
+          <p:cNvPr id="55" name="Text 50"/>
+          <p:cNvSpPr/>
+          <p:nvPr/>
+        </p:nvSpPr>
+        <p:spPr>
+          <a:xfrm>
+            <a:off x="3820032" y="7221672"/>
             <a:ext cx="3051936" cy="164592"/>
           </a:xfrm>
           <a:prstGeom prst="rect">
@@ -3091,7 +3266,7 @@
       </p:sp>
       <p:sp>
         <p:nvSpPr>
-          <p:cNvPr id="52" name="Shape 47"/>
+          <p:cNvPr id="56" name="Shape 51"/>
           <p:cNvSpPr/>
           <p:nvPr/>
         </p:nvSpPr>
@@ -3104,14 +3279,14 @@
             <a:avLst/>
           </a:prstGeom>
           <a:solidFill>
-            <a:srgbClr val="180E4E"/>
+            <a:srgbClr val="503BF6"/>
           </a:solidFill>
           <a:ln/>
         </p:spPr>
       </p:sp>
       <p:pic>
         <p:nvPicPr>
-          <p:cNvPr id="53" name="Image 3" descr="/home/user/Site/folder/pptx/assets/logo.png">    </p:cNvPr>
+          <p:cNvPr id="57" name="Image 3" descr="/home/user/Site/folder/pptx/assets/logo.png">    </p:cNvPr>
           <p:cNvPicPr>
             <a:picLocks noChangeAspect="1"/>
           </p:cNvPicPr>
@@ -3135,7 +3310,7 @@
       </p:pic>
       <p:sp>
         <p:nvSpPr>
-          <p:cNvPr id="54" name="Text 48"/>
+          <p:cNvPr id="58" name="Text 52"/>
           <p:cNvSpPr/>
           <p:nvPr/>
         </p:nvSpPr>
@@ -3174,7 +3349,7 @@
       </p:sp>
       <p:sp>
         <p:nvSpPr>
-          <p:cNvPr id="55" name="Text 49"/>
+          <p:cNvPr id="59" name="Text 53"/>
           <p:cNvSpPr/>
           <p:nvPr/>
         </p:nvSpPr>
@@ -3199,7 +3374,7 @@
             <a:r>
               <a:rPr lang="en-US" sz="700" b="1" spc="100" kern="0" dirty="0">
                 <a:solidFill>
-                  <a:srgbClr val="9AA0D8"/>
+                  <a:srgbClr val="B9C0FF"/>
                 </a:solidFill>
                 <a:latin typeface="Calibri" pitchFamily="34" charset="0"/>
                 <a:ea typeface="Calibri" pitchFamily="34" charset="-122"/>
@@ -3213,18 +3388,18 @@
       </p:sp>
       <p:sp>
         <p:nvSpPr>
-          <p:cNvPr id="56" name="Text 50"/>
+          <p:cNvPr id="60" name="Text 54"/>
           <p:cNvSpPr/>
           <p:nvPr/>
         </p:nvSpPr>
         <p:spPr>
           <a:xfrm rot="-180000">
-            <a:off x="7384032" y="896112"/>
-            <a:ext cx="960120" cy="384048"/>
+            <a:off x="7384032" y="877824"/>
+            <a:ext cx="914400" cy="365760"/>
           </a:xfrm>
           <a:prstGeom prst="roundRect">
             <a:avLst>
-              <a:gd name="adj" fmla="val 19048"/>
+              <a:gd name="adj" fmla="val 20000"/>
             </a:avLst>
           </a:prstGeom>
           <a:solidFill>
@@ -3237,7 +3412,7 @@
           </a:ln>
           <a:effectLst>
             <a:outerShdw sx="100000" sy="100000" kx="0" ky="0" algn="bl" rotWithShape="0" blurRad="101600" dist="63500" dir="2700000">
-              <a:srgbClr val="180E4E">
+              <a:srgbClr val="000000">
                 <a:alpha val="85000"/>
               </a:srgbClr>
             </a:outerShdw>
@@ -3251,7 +3426,7 @@
               <a:buNone/>
             </a:pPr>
             <a:r>
-              <a:rPr lang="en-US" sz="2000" b="1" dirty="0">
+              <a:rPr lang="en-US" sz="1900" b="1" dirty="0">
                 <a:solidFill>
                   <a:srgbClr val="180E4E"/>
                 </a:solidFill>
@@ -3261,24 +3436,24 @@
               </a:rPr>
               <a:t>EI</a:t>
             </a:r>
-            <a:endParaRPr lang="en-US" sz="2000" dirty="0"/>
-          </a:p>
-        </p:txBody>
-      </p:sp>
-      <p:sp>
-        <p:nvSpPr>
-          <p:cNvPr id="57" name="Text 51"/>
+            <a:endParaRPr lang="en-US" sz="1900" dirty="0"/>
+          </a:p>
+        </p:txBody>
+      </p:sp>
+      <p:sp>
+        <p:nvSpPr>
+          <p:cNvPr id="61" name="Text 55"/>
           <p:cNvSpPr/>
           <p:nvPr/>
         </p:nvSpPr>
         <p:spPr>
           <a:xfrm rot="144000">
-            <a:off x="7384032" y="1353312"/>
-            <a:ext cx="3051936" cy="420624"/>
+            <a:off x="7384032" y="1316736"/>
+            <a:ext cx="3051936" cy="402336"/>
           </a:xfrm>
           <a:prstGeom prst="roundRect">
             <a:avLst>
-              <a:gd name="adj" fmla="val 17391"/>
+              <a:gd name="adj" fmla="val 18182"/>
             </a:avLst>
           </a:prstGeom>
           <a:solidFill>
@@ -3291,7 +3466,7 @@
           </a:ln>
           <a:effectLst>
             <a:outerShdw sx="100000" sy="100000" kx="0" ky="0" algn="bl" rotWithShape="0" blurRad="101600" dist="63500" dir="2700000">
-              <a:srgbClr val="180E4E">
+              <a:srgbClr val="000000">
                 <a:alpha val="85000"/>
               </a:srgbClr>
             </a:outerShdw>
@@ -3305,7 +3480,7 @@
               <a:buNone/>
             </a:pPr>
             <a:r>
-              <a:rPr lang="en-US" sz="1700" b="1" dirty="0">
+              <a:rPr lang="en-US" sz="1600" b="1" dirty="0">
                 <a:solidFill>
                   <a:srgbClr val="180E4E"/>
                 </a:solidFill>
@@ -3315,20 +3490,20 @@
               </a:rPr>
               <a:t>PROFESSOR(A)</a:t>
             </a:r>
-            <a:endParaRPr lang="en-US" sz="1700" dirty="0"/>
-          </a:p>
-        </p:txBody>
-      </p:sp>
-      <p:sp>
-        <p:nvSpPr>
-          <p:cNvPr id="58" name="Text 52"/>
-          <p:cNvSpPr/>
-          <p:nvPr/>
-        </p:nvSpPr>
-        <p:spPr>
-          <a:xfrm>
-            <a:off x="7384032" y="1920240"/>
-            <a:ext cx="3051936" cy="685800"/>
+            <a:endParaRPr lang="en-US" sz="1600" dirty="0"/>
+          </a:p>
+        </p:txBody>
+      </p:sp>
+      <p:sp>
+        <p:nvSpPr>
+          <p:cNvPr id="62" name="Text 56"/>
+          <p:cNvSpPr/>
+          <p:nvPr/>
+        </p:nvSpPr>
+        <p:spPr>
+          <a:xfrm>
+            <a:off x="7384032" y="1847088"/>
+            <a:ext cx="3051936" cy="640080"/>
           </a:xfrm>
           <a:prstGeom prst="rect">
             <a:avLst/>
@@ -3342,12 +3517,12 @@
           <a:p>
             <a:pPr indent="0" marL="0">
               <a:lnSpc>
-                <a:spcPts val="1512"/>
+                <a:spcPts val="1458"/>
               </a:lnSpc>
               <a:buNone/>
             </a:pPr>
             <a:r>
-              <a:rPr lang="en-US" sz="1400" b="1" dirty="0">
+              <a:rPr lang="en-US" sz="1350" b="1" dirty="0">
                 <a:solidFill>
                   <a:srgbClr val="FFFFFF"/>
                 </a:solidFill>
@@ -3357,20 +3532,20 @@
               </a:rPr>
               <a:t>Cansado de fazer tudo sozinho e sem tempo de sobra?</a:t>
             </a:r>
-            <a:endParaRPr lang="en-US" sz="1400" dirty="0"/>
-          </a:p>
-        </p:txBody>
-      </p:sp>
-      <p:sp>
-        <p:nvSpPr>
-          <p:cNvPr id="59" name="Text 53"/>
-          <p:cNvSpPr/>
-          <p:nvPr/>
-        </p:nvSpPr>
-        <p:spPr>
-          <a:xfrm>
-            <a:off x="7384032" y="2651760"/>
-            <a:ext cx="3051936" cy="365760"/>
+            <a:endParaRPr lang="en-US" sz="1350" dirty="0"/>
+          </a:p>
+        </p:txBody>
+      </p:sp>
+      <p:sp>
+        <p:nvSpPr>
+          <p:cNvPr id="63" name="Text 57"/>
+          <p:cNvSpPr/>
+          <p:nvPr/>
+        </p:nvSpPr>
+        <p:spPr>
+          <a:xfrm>
+            <a:off x="7384032" y="2523744"/>
+            <a:ext cx="3051936" cy="329184"/>
           </a:xfrm>
           <a:prstGeom prst="rect">
             <a:avLst/>
@@ -3391,7 +3566,7 @@
             <a:r>
               <a:rPr lang="en-US" sz="900" dirty="0">
                 <a:solidFill>
-                  <a:srgbClr val="D9DCFF"/>
+                  <a:srgbClr val="DCDFFF"/>
                 </a:solidFill>
                 <a:latin typeface="Calibri" pitchFamily="34" charset="0"/>
                 <a:ea typeface="Calibri" pitchFamily="34" charset="-122"/>
@@ -3405,7 +3580,7 @@
       </p:sp>
       <p:pic>
         <p:nvPicPr>
-          <p:cNvPr id="60" name="Image 4" descr="/home/user/Site/folder/pptx/assets/illu-01.png">    </p:cNvPr>
+          <p:cNvPr id="64" name="Image 4" descr="/home/user/Site/folder/pptx/assets/illu-01.png">    </p:cNvPr>
           <p:cNvPicPr>
             <a:picLocks noChangeAspect="1"/>
           </p:cNvPicPr>
@@ -3418,8 +3593,8 @@
         </p:blipFill>
         <p:spPr>
           <a:xfrm>
-            <a:off x="7341840" y="4313880"/>
-            <a:ext cx="3136320" cy="2880360"/>
+            <a:off x="7767000" y="2907792"/>
+            <a:ext cx="2286000" cy="2286000"/>
           </a:xfrm>
           <a:prstGeom prst="rect">
             <a:avLst/>
@@ -3428,13 +3603,165 @@
       </p:pic>
       <p:sp>
         <p:nvSpPr>
-          <p:cNvPr id="61" name="Text 54"/>
+          <p:cNvPr id="65" name="Shape 58"/>
+          <p:cNvSpPr/>
+          <p:nvPr/>
+        </p:nvSpPr>
+        <p:spPr>
+          <a:xfrm>
+            <a:off x="7384032" y="5987232"/>
+            <a:ext cx="3051936" cy="566928"/>
+          </a:xfrm>
+          <a:prstGeom prst="roundRect">
+            <a:avLst>
+              <a:gd name="adj" fmla="val 9677"/>
+            </a:avLst>
+          </a:prstGeom>
+          <a:solidFill>
+            <a:srgbClr val="FFFFFF"/>
+          </a:solidFill>
+          <a:ln w="31750">
+            <a:solidFill>
+              <a:srgbClr val="180E4E"/>
+            </a:solidFill>
+            <a:prstDash val="solid"/>
+          </a:ln>
+          <a:effectLst>
+            <a:outerShdw sx="100000" sy="100000" kx="0" ky="0" algn="bl" rotWithShape="0" blurRad="101600" dist="63500" dir="2700000">
+              <a:srgbClr val="000000">
+                <a:alpha val="50000"/>
+              </a:srgbClr>
+            </a:outerShdw>
+          </a:effectLst>
+        </p:spPr>
+      </p:sp>
+      <p:sp>
+        <p:nvSpPr>
+          <p:cNvPr id="66" name="Text 59"/>
+          <p:cNvSpPr/>
+          <p:nvPr/>
+        </p:nvSpPr>
+        <p:spPr>
+          <a:xfrm>
+            <a:off x="7493760" y="6051240"/>
+            <a:ext cx="2832480" cy="438912"/>
+          </a:xfrm>
+          <a:prstGeom prst="rect">
+            <a:avLst/>
+          </a:prstGeom>
+          <a:noFill/>
+          <a:ln/>
+        </p:spPr>
+        <p:txBody>
+          <a:bodyPr wrap="square" lIns="0" tIns="0" rIns="0" bIns="0" rtlCol="0" anchor="ctr"/>
+          <a:lstStyle/>
+          <a:p>
+            <a:pPr indent="0" marL="0">
+              <a:lnSpc>
+                <a:spcPts val="1100"/>
+              </a:lnSpc>
+              <a:buNone/>
+            </a:pPr>
+            <a:r>
+              <a:rPr lang="en-US" sz="880" dirty="0">
+                <a:solidFill>
+                  <a:srgbClr val="180E4E"/>
+                </a:solidFill>
+                <a:latin typeface="Calibri" pitchFamily="34" charset="0"/>
+                <a:ea typeface="Calibri" pitchFamily="34" charset="-122"/>
+                <a:cs typeface="Calibri" pitchFamily="34" charset="-120"/>
+              </a:rPr>
+              <a:t>O Prof. Corujão é um site que </a:t>
+            </a:r>
+            <a:pPr indent="0" marL="0">
+              <a:lnSpc>
+                <a:spcPts val="1100"/>
+              </a:lnSpc>
+              <a:buNone/>
+            </a:pPr>
+            <a:r>
+              <a:rPr lang="en-US" sz="880" b="1" dirty="0">
+                <a:solidFill>
+                  <a:srgbClr val="180E4E"/>
+                </a:solidFill>
+                <a:latin typeface="Calibri" pitchFamily="34" charset="0"/>
+                <a:ea typeface="Calibri" pitchFamily="34" charset="-122"/>
+                <a:cs typeface="Calibri" pitchFamily="34" charset="-120"/>
+              </a:rPr>
+              <a:t>monta o plano de aula, a prova e os slides da sua aula</a:t>
+            </a:r>
+            <a:pPr indent="0" marL="0">
+              <a:lnSpc>
+                <a:spcPts val="1100"/>
+              </a:lnSpc>
+              <a:buNone/>
+            </a:pPr>
+            <a:r>
+              <a:rPr lang="en-US" sz="880" dirty="0">
+                <a:solidFill>
+                  <a:srgbClr val="180E4E"/>
+                </a:solidFill>
+                <a:latin typeface="Calibri" pitchFamily="34" charset="0"/>
+                <a:ea typeface="Calibri" pitchFamily="34" charset="-122"/>
+                <a:cs typeface="Calibri" pitchFamily="34" charset="-120"/>
+              </a:rPr>
+              <a:t>. Você só escreve o tema.</a:t>
+            </a:r>
+            <a:endParaRPr lang="en-US" sz="880" dirty="0"/>
+          </a:p>
+        </p:txBody>
+      </p:sp>
+      <p:sp>
+        <p:nvSpPr>
+          <p:cNvPr id="67" name="Text 60"/>
+          <p:cNvSpPr/>
+          <p:nvPr/>
+        </p:nvSpPr>
+        <p:spPr>
+          <a:xfrm>
+            <a:off x="7384032" y="6645600"/>
+            <a:ext cx="3051936" cy="182880"/>
+          </a:xfrm>
+          <a:prstGeom prst="rect">
+            <a:avLst/>
+          </a:prstGeom>
+          <a:noFill/>
+          <a:ln/>
+        </p:spPr>
+        <p:txBody>
+          <a:bodyPr wrap="square" lIns="0" tIns="0" rIns="0" bIns="0" rtlCol="0" anchor="t"/>
+          <a:lstStyle/>
+          <a:p>
+            <a:pPr indent="0" marL="0">
+              <a:lnSpc>
+                <a:spcPts val="1148"/>
+              </a:lnSpc>
+              <a:buNone/>
+            </a:pPr>
+            <a:r>
+              <a:rPr lang="en-US" sz="850" b="1" dirty="0">
+                <a:solidFill>
+                  <a:srgbClr val="DCDFFF"/>
+                </a:solidFill>
+                <a:latin typeface="Calibri" pitchFamily="34" charset="0"/>
+                <a:ea typeface="Calibri" pitchFamily="34" charset="-122"/>
+                <a:cs typeface="Calibri" pitchFamily="34" charset="-120"/>
+              </a:rPr>
+              <a:t>Abra o folder e veja como funciona.</a:t>
+            </a:r>
+            <a:endParaRPr lang="en-US" sz="850" dirty="0"/>
+          </a:p>
+        </p:txBody>
+      </p:sp>
+      <p:sp>
+        <p:nvSpPr>
+          <p:cNvPr id="68" name="Text 61"/>
           <p:cNvSpPr/>
           <p:nvPr/>
         </p:nvSpPr>
         <p:spPr>
           <a:xfrm rot="-120000">
-            <a:off x="7384032" y="6737040"/>
+            <a:off x="7384032" y="6883344"/>
             <a:ext cx="1828800" cy="219456"/>
           </a:xfrm>
           <a:prstGeom prst="roundRect">
@@ -3482,55 +3809,13 @@
       </p:sp>
       <p:sp>
         <p:nvSpPr>
-          <p:cNvPr id="62" name="Text 55"/>
-          <p:cNvSpPr/>
-          <p:nvPr/>
-        </p:nvSpPr>
-        <p:spPr>
-          <a:xfrm>
-            <a:off x="7384032" y="7011360"/>
-            <a:ext cx="3051936" cy="274320"/>
-          </a:xfrm>
-          <a:prstGeom prst="rect">
-            <a:avLst/>
-          </a:prstGeom>
-          <a:noFill/>
-          <a:ln/>
-        </p:spPr>
-        <p:txBody>
-          <a:bodyPr wrap="square" lIns="0" tIns="0" rIns="0" bIns="0" rtlCol="0" anchor="t"/>
-          <a:lstStyle/>
-          <a:p>
-            <a:pPr indent="0" marL="0">
-              <a:lnSpc>
-                <a:spcPts val="1080"/>
-              </a:lnSpc>
-              <a:buNone/>
-            </a:pPr>
-            <a:r>
-              <a:rPr lang="en-US" sz="800" dirty="0">
-                <a:solidFill>
-                  <a:srgbClr val="D9DCFF"/>
-                </a:solidFill>
-                <a:latin typeface="Calibri" pitchFamily="34" charset="0"/>
-                <a:ea typeface="Calibri" pitchFamily="34" charset="-122"/>
-                <a:cs typeface="Calibri" pitchFamily="34" charset="-120"/>
-              </a:rPr>
-              <a:t>O assistente de IA feito por professor, para professor.</a:t>
-            </a:r>
-            <a:endParaRPr lang="en-US" sz="800" dirty="0"/>
-          </a:p>
-        </p:txBody>
-      </p:sp>
-      <p:sp>
-        <p:nvSpPr>
-          <p:cNvPr id="63" name="Text 56"/>
-          <p:cNvSpPr/>
-          <p:nvPr/>
-        </p:nvSpPr>
-        <p:spPr>
-          <a:xfrm>
-            <a:off x="7384032" y="7285680"/>
+          <p:cNvPr id="69" name="Text 62"/>
+          <p:cNvSpPr/>
+          <p:nvPr/>
+        </p:nvSpPr>
+        <p:spPr>
+          <a:xfrm>
+            <a:off x="7384032" y="7175952"/>
             <a:ext cx="3051936" cy="182880"/>
           </a:xfrm>
           <a:prstGeom prst="rect">
@@ -3626,7 +3911,7 @@
                 <a:ea typeface="Calibri" pitchFamily="34" charset="-122"/>
                 <a:cs typeface="Calibri" pitchFamily="34" charset="-120"/>
               </a:rPr>
-              <a:t>O QUE VEM JUNTO</a:t>
+              <a:t>COMO FUNCIONA</a:t>
             </a:r>
             <a:endParaRPr lang="en-US" sz="900" dirty="0"/>
           </a:p>
@@ -3641,7 +3926,7 @@
         <p:spPr>
           <a:xfrm>
             <a:off x="256032" y="530352"/>
-            <a:ext cx="3051936" cy="256032"/>
+            <a:ext cx="3051936" cy="274320"/>
           </a:xfrm>
           <a:prstGeom prst="rect">
             <a:avLst/>
@@ -3655,12 +3940,12 @@
           <a:p>
             <a:pPr indent="0" marL="0">
               <a:lnSpc>
-                <a:spcPts val="1674"/>
+                <a:spcPts val="1836"/>
               </a:lnSpc>
               <a:buNone/>
             </a:pPr>
             <a:r>
-              <a:rPr lang="en-US" sz="1550" b="1" dirty="0">
+              <a:rPr lang="en-US" sz="1700" b="1" dirty="0">
                 <a:solidFill>
                   <a:srgbClr val="180E4E"/>
                 </a:solidFill>
@@ -3668,9 +3953,9 @@
                 <a:ea typeface="Cambria" pitchFamily="34" charset="-122"/>
                 <a:cs typeface="Cambria" pitchFamily="34" charset="-120"/>
               </a:rPr>
-              <a:t>Meia dúzia de apps num</a:t>
-            </a:r>
-            <a:endParaRPr lang="en-US" sz="1550" dirty="0"/>
+              <a:t>Três passos.</a:t>
+            </a:r>
+            <a:endParaRPr lang="en-US" sz="1700" dirty="0"/>
           </a:p>
         </p:txBody>
       </p:sp>
@@ -3682,8 +3967,8 @@
         </p:nvSpPr>
         <p:spPr>
           <a:xfrm rot="-180000">
-            <a:off x="256032" y="822960"/>
-            <a:ext cx="1371600" cy="329184"/>
+            <a:off x="256032" y="841248"/>
+            <a:ext cx="1234440" cy="329184"/>
           </a:xfrm>
           <a:prstGeom prst="roundRect">
             <a:avLst>
@@ -3722,7 +4007,7 @@
                 <a:ea typeface="Cambria" pitchFamily="34" charset="-122"/>
                 <a:cs typeface="Cambria" pitchFamily="34" charset="-120"/>
               </a:rPr>
-              <a:t>só lugar.</a:t>
+              <a:t>Só isso.</a:t>
             </a:r>
             <a:endParaRPr lang="en-US" sz="1300" dirty="0"/>
           </a:p>
@@ -3730,14 +4015,112 @@
       </p:sp>
       <p:sp>
         <p:nvSpPr>
-          <p:cNvPr id="5" name="Text 3"/>
-          <p:cNvSpPr/>
-          <p:nvPr/>
-        </p:nvSpPr>
-        <p:spPr>
-          <a:xfrm>
-            <a:off x="256032" y="1280160"/>
-            <a:ext cx="3051936" cy="457200"/>
+          <p:cNvPr id="5" name="Shape 3"/>
+          <p:cNvSpPr/>
+          <p:nvPr/>
+        </p:nvSpPr>
+        <p:spPr>
+          <a:xfrm>
+            <a:off x="256032" y="1353312"/>
+            <a:ext cx="219456" cy="219456"/>
+          </a:xfrm>
+          <a:prstGeom prst="ellipse">
+            <a:avLst/>
+          </a:prstGeom>
+          <a:solidFill>
+            <a:srgbClr val="4659FF"/>
+          </a:solidFill>
+          <a:ln/>
+        </p:spPr>
+      </p:sp>
+      <p:sp>
+        <p:nvSpPr>
+          <p:cNvPr id="6" name="Text 4"/>
+          <p:cNvSpPr/>
+          <p:nvPr/>
+        </p:nvSpPr>
+        <p:spPr>
+          <a:xfrm>
+            <a:off x="256032" y="1353312"/>
+            <a:ext cx="219456" cy="219456"/>
+          </a:xfrm>
+          <a:prstGeom prst="rect">
+            <a:avLst/>
+          </a:prstGeom>
+          <a:noFill/>
+          <a:ln/>
+        </p:spPr>
+        <p:txBody>
+          <a:bodyPr wrap="square" lIns="0" tIns="0" rIns="0" bIns="0" rtlCol="0" anchor="ctr"/>
+          <a:lstStyle/>
+          <a:p>
+            <a:pPr algn="ctr" indent="0" marL="0">
+              <a:buNone/>
+            </a:pPr>
+            <a:r>
+              <a:rPr lang="en-US" sz="1000" b="1" dirty="0">
+                <a:solidFill>
+                  <a:srgbClr val="FFFFFF"/>
+                </a:solidFill>
+                <a:latin typeface="Calibri" pitchFamily="34" charset="0"/>
+                <a:ea typeface="Calibri" pitchFamily="34" charset="-122"/>
+                <a:cs typeface="Calibri" pitchFamily="34" charset="-120"/>
+              </a:rPr>
+              <a:t>1</a:t>
+            </a:r>
+            <a:endParaRPr lang="en-US" sz="1000" dirty="0"/>
+          </a:p>
+        </p:txBody>
+      </p:sp>
+      <p:sp>
+        <p:nvSpPr>
+          <p:cNvPr id="7" name="Text 5"/>
+          <p:cNvSpPr/>
+          <p:nvPr/>
+        </p:nvSpPr>
+        <p:spPr>
+          <a:xfrm>
+            <a:off x="566928" y="1344168"/>
+            <a:ext cx="2741040" cy="182880"/>
+          </a:xfrm>
+          <a:prstGeom prst="rect">
+            <a:avLst/>
+          </a:prstGeom>
+          <a:noFill/>
+          <a:ln/>
+        </p:spPr>
+        <p:txBody>
+          <a:bodyPr wrap="square" lIns="0" tIns="0" rIns="0" bIns="0" rtlCol="0" anchor="ctr"/>
+          <a:lstStyle/>
+          <a:p>
+            <a:pPr indent="0" marL="0">
+              <a:buNone/>
+            </a:pPr>
+            <a:r>
+              <a:rPr lang="en-US" sz="1150" b="1" dirty="0">
+                <a:solidFill>
+                  <a:srgbClr val="180E4E"/>
+                </a:solidFill>
+                <a:latin typeface="Cambria" pitchFamily="34" charset="0"/>
+                <a:ea typeface="Cambria" pitchFamily="34" charset="-122"/>
+                <a:cs typeface="Cambria" pitchFamily="34" charset="-120"/>
+              </a:rPr>
+              <a:t>Escreva o tema e a turma</a:t>
+            </a:r>
+            <a:endParaRPr lang="en-US" sz="1150" dirty="0"/>
+          </a:p>
+        </p:txBody>
+      </p:sp>
+      <p:sp>
+        <p:nvSpPr>
+          <p:cNvPr id="8" name="Text 6"/>
+          <p:cNvSpPr/>
+          <p:nvPr/>
+        </p:nvSpPr>
+        <p:spPr>
+          <a:xfrm>
+            <a:off x="566928" y="1536192"/>
+            <a:ext cx="2741040" cy="420624"/>
           </a:xfrm>
           <a:prstGeom prst="rect">
             <a:avLst/>
@@ -3751,7 +4134,7 @@
           <a:p>
             <a:pPr indent="0" marL="0">
               <a:lnSpc>
-                <a:spcPts val="1215"/>
+                <a:spcPts val="1100"/>
               </a:lnSpc>
               <a:buNone/>
             </a:pPr>
@@ -3764,7 +4147,7 @@
                 <a:ea typeface="Calibri" pitchFamily="34" charset="-122"/>
                 <a:cs typeface="Calibri" pitchFamily="34" charset="-120"/>
               </a:rPr>
-              <a:t>Cada ferramenta resolve uma dor que você tem hoje. Juntas, devolvem as horas que o planejamento come da sua semana.</a:t>
+              <a:t>Do jeito que você falaria: “Fotossíntese, 8º ano”. Não tem configuração nem palavra técnica.</a:t>
             </a:r>
             <a:endParaRPr lang="en-US" sz="900" dirty="0"/>
           </a:p>
@@ -3772,18 +4155,298 @@
       </p:sp>
       <p:sp>
         <p:nvSpPr>
-          <p:cNvPr id="6" name="Shape 4"/>
-          <p:cNvSpPr/>
-          <p:nvPr/>
-        </p:nvSpPr>
-        <p:spPr>
-          <a:xfrm>
-            <a:off x="256032" y="1783080"/>
-            <a:ext cx="3051936" cy="841248"/>
+          <p:cNvPr id="9" name="Shape 7"/>
+          <p:cNvSpPr/>
+          <p:nvPr/>
+        </p:nvSpPr>
+        <p:spPr>
+          <a:xfrm>
+            <a:off x="256032" y="2103120"/>
+            <a:ext cx="219456" cy="219456"/>
+          </a:xfrm>
+          <a:prstGeom prst="ellipse">
+            <a:avLst/>
+          </a:prstGeom>
+          <a:solidFill>
+            <a:srgbClr val="4659FF"/>
+          </a:solidFill>
+          <a:ln/>
+        </p:spPr>
+      </p:sp>
+      <p:sp>
+        <p:nvSpPr>
+          <p:cNvPr id="10" name="Text 8"/>
+          <p:cNvSpPr/>
+          <p:nvPr/>
+        </p:nvSpPr>
+        <p:spPr>
+          <a:xfrm>
+            <a:off x="256032" y="2103120"/>
+            <a:ext cx="219456" cy="219456"/>
+          </a:xfrm>
+          <a:prstGeom prst="rect">
+            <a:avLst/>
+          </a:prstGeom>
+          <a:noFill/>
+          <a:ln/>
+        </p:spPr>
+        <p:txBody>
+          <a:bodyPr wrap="square" lIns="0" tIns="0" rIns="0" bIns="0" rtlCol="0" anchor="ctr"/>
+          <a:lstStyle/>
+          <a:p>
+            <a:pPr algn="ctr" indent="0" marL="0">
+              <a:buNone/>
+            </a:pPr>
+            <a:r>
+              <a:rPr lang="en-US" sz="1000" b="1" dirty="0">
+                <a:solidFill>
+                  <a:srgbClr val="FFFFFF"/>
+                </a:solidFill>
+                <a:latin typeface="Calibri" pitchFamily="34" charset="0"/>
+                <a:ea typeface="Calibri" pitchFamily="34" charset="-122"/>
+                <a:cs typeface="Calibri" pitchFamily="34" charset="-120"/>
+              </a:rPr>
+              <a:t>2</a:t>
+            </a:r>
+            <a:endParaRPr lang="en-US" sz="1000" dirty="0"/>
+          </a:p>
+        </p:txBody>
+      </p:sp>
+      <p:sp>
+        <p:nvSpPr>
+          <p:cNvPr id="11" name="Text 9"/>
+          <p:cNvSpPr/>
+          <p:nvPr/>
+        </p:nvSpPr>
+        <p:spPr>
+          <a:xfrm>
+            <a:off x="566928" y="2093976"/>
+            <a:ext cx="2741040" cy="182880"/>
+          </a:xfrm>
+          <a:prstGeom prst="rect">
+            <a:avLst/>
+          </a:prstGeom>
+          <a:noFill/>
+          <a:ln/>
+        </p:spPr>
+        <p:txBody>
+          <a:bodyPr wrap="square" lIns="0" tIns="0" rIns="0" bIns="0" rtlCol="0" anchor="ctr"/>
+          <a:lstStyle/>
+          <a:p>
+            <a:pPr indent="0" marL="0">
+              <a:buNone/>
+            </a:pPr>
+            <a:r>
+              <a:rPr lang="en-US" sz="1150" b="1" dirty="0">
+                <a:solidFill>
+                  <a:srgbClr val="180E4E"/>
+                </a:solidFill>
+                <a:latin typeface="Cambria" pitchFamily="34" charset="0"/>
+                <a:ea typeface="Cambria" pitchFamily="34" charset="-122"/>
+                <a:cs typeface="Cambria" pitchFamily="34" charset="-120"/>
+              </a:rPr>
+              <a:t>Espere alguns segundos</a:t>
+            </a:r>
+            <a:endParaRPr lang="en-US" sz="1150" dirty="0"/>
+          </a:p>
+        </p:txBody>
+      </p:sp>
+      <p:sp>
+        <p:nvSpPr>
+          <p:cNvPr id="12" name="Text 10"/>
+          <p:cNvSpPr/>
+          <p:nvPr/>
+        </p:nvSpPr>
+        <p:spPr>
+          <a:xfrm>
+            <a:off x="566928" y="2286000"/>
+            <a:ext cx="2741040" cy="420624"/>
+          </a:xfrm>
+          <a:prstGeom prst="rect">
+            <a:avLst/>
+          </a:prstGeom>
+          <a:noFill/>
+          <a:ln/>
+        </p:spPr>
+        <p:txBody>
+          <a:bodyPr wrap="square" lIns="0" tIns="0" rIns="0" bIns="0" rtlCol="0" anchor="t"/>
+          <a:lstStyle/>
+          <a:p>
+            <a:pPr indent="0" marL="0">
+              <a:lnSpc>
+                <a:spcPts val="1100"/>
+              </a:lnSpc>
+              <a:buNone/>
+            </a:pPr>
+            <a:r>
+              <a:rPr lang="en-US" sz="900" dirty="0">
+                <a:solidFill>
+                  <a:srgbClr val="5B6070"/>
+                </a:solidFill>
+                <a:latin typeface="Calibri" pitchFamily="34" charset="0"/>
+                <a:ea typeface="Calibri" pitchFamily="34" charset="-122"/>
+                <a:cs typeface="Calibri" pitchFamily="34" charset="-120"/>
+              </a:rPr>
+              <a:t>Ele monta enquanto você faz outra coisa e avisa quando termina. Dá tempo de sair da escola.</a:t>
+            </a:r>
+            <a:endParaRPr lang="en-US" sz="900" dirty="0"/>
+          </a:p>
+        </p:txBody>
+      </p:sp>
+      <p:sp>
+        <p:nvSpPr>
+          <p:cNvPr id="13" name="Shape 11"/>
+          <p:cNvSpPr/>
+          <p:nvPr/>
+        </p:nvSpPr>
+        <p:spPr>
+          <a:xfrm>
+            <a:off x="256032" y="2852928"/>
+            <a:ext cx="219456" cy="219456"/>
+          </a:xfrm>
+          <a:prstGeom prst="ellipse">
+            <a:avLst/>
+          </a:prstGeom>
+          <a:solidFill>
+            <a:srgbClr val="4659FF"/>
+          </a:solidFill>
+          <a:ln/>
+        </p:spPr>
+      </p:sp>
+      <p:sp>
+        <p:nvSpPr>
+          <p:cNvPr id="14" name="Text 12"/>
+          <p:cNvSpPr/>
+          <p:nvPr/>
+        </p:nvSpPr>
+        <p:spPr>
+          <a:xfrm>
+            <a:off x="256032" y="2852928"/>
+            <a:ext cx="219456" cy="219456"/>
+          </a:xfrm>
+          <a:prstGeom prst="rect">
+            <a:avLst/>
+          </a:prstGeom>
+          <a:noFill/>
+          <a:ln/>
+        </p:spPr>
+        <p:txBody>
+          <a:bodyPr wrap="square" lIns="0" tIns="0" rIns="0" bIns="0" rtlCol="0" anchor="ctr"/>
+          <a:lstStyle/>
+          <a:p>
+            <a:pPr algn="ctr" indent="0" marL="0">
+              <a:buNone/>
+            </a:pPr>
+            <a:r>
+              <a:rPr lang="en-US" sz="1000" b="1" dirty="0">
+                <a:solidFill>
+                  <a:srgbClr val="FFFFFF"/>
+                </a:solidFill>
+                <a:latin typeface="Calibri" pitchFamily="34" charset="0"/>
+                <a:ea typeface="Calibri" pitchFamily="34" charset="-122"/>
+                <a:cs typeface="Calibri" pitchFamily="34" charset="-120"/>
+              </a:rPr>
+              <a:t>3</a:t>
+            </a:r>
+            <a:endParaRPr lang="en-US" sz="1000" dirty="0"/>
+          </a:p>
+        </p:txBody>
+      </p:sp>
+      <p:sp>
+        <p:nvSpPr>
+          <p:cNvPr id="15" name="Text 13"/>
+          <p:cNvSpPr/>
+          <p:nvPr/>
+        </p:nvSpPr>
+        <p:spPr>
+          <a:xfrm>
+            <a:off x="566928" y="2843784"/>
+            <a:ext cx="2741040" cy="182880"/>
+          </a:xfrm>
+          <a:prstGeom prst="rect">
+            <a:avLst/>
+          </a:prstGeom>
+          <a:noFill/>
+          <a:ln/>
+        </p:spPr>
+        <p:txBody>
+          <a:bodyPr wrap="square" lIns="0" tIns="0" rIns="0" bIns="0" rtlCol="0" anchor="ctr"/>
+          <a:lstStyle/>
+          <a:p>
+            <a:pPr indent="0" marL="0">
+              <a:buNone/>
+            </a:pPr>
+            <a:r>
+              <a:rPr lang="en-US" sz="1150" b="1" dirty="0">
+                <a:solidFill>
+                  <a:srgbClr val="180E4E"/>
+                </a:solidFill>
+                <a:latin typeface="Cambria" pitchFamily="34" charset="0"/>
+                <a:ea typeface="Cambria" pitchFamily="34" charset="-122"/>
+                <a:cs typeface="Cambria" pitchFamily="34" charset="-120"/>
+              </a:rPr>
+              <a:t>Revise, imprima ou projete</a:t>
+            </a:r>
+            <a:endParaRPr lang="en-US" sz="1150" dirty="0"/>
+          </a:p>
+        </p:txBody>
+      </p:sp>
+      <p:sp>
+        <p:nvSpPr>
+          <p:cNvPr id="16" name="Text 14"/>
+          <p:cNvSpPr/>
+          <p:nvPr/>
+        </p:nvSpPr>
+        <p:spPr>
+          <a:xfrm>
+            <a:off x="566928" y="3035808"/>
+            <a:ext cx="2741040" cy="420624"/>
+          </a:xfrm>
+          <a:prstGeom prst="rect">
+            <a:avLst/>
+          </a:prstGeom>
+          <a:noFill/>
+          <a:ln/>
+        </p:spPr>
+        <p:txBody>
+          <a:bodyPr wrap="square" lIns="0" tIns="0" rIns="0" bIns="0" rtlCol="0" anchor="t"/>
+          <a:lstStyle/>
+          <a:p>
+            <a:pPr indent="0" marL="0">
+              <a:lnSpc>
+                <a:spcPts val="1100"/>
+              </a:lnSpc>
+              <a:buNone/>
+            </a:pPr>
+            <a:r>
+              <a:rPr lang="en-US" sz="900" dirty="0">
+                <a:solidFill>
+                  <a:srgbClr val="5B6070"/>
+                </a:solidFill>
+                <a:latin typeface="Calibri" pitchFamily="34" charset="0"/>
+                <a:ea typeface="Calibri" pitchFamily="34" charset="-122"/>
+                <a:cs typeface="Calibri" pitchFamily="34" charset="-120"/>
+              </a:rPr>
+              <a:t>Baixa em Word e PowerPoint. Você lê, muda o que quiser e usa. Nada vai para a turma sem você aprovar.</a:t>
+            </a:r>
+            <a:endParaRPr lang="en-US" sz="900" dirty="0"/>
+          </a:p>
+        </p:txBody>
+      </p:sp>
+      <p:sp>
+        <p:nvSpPr>
+          <p:cNvPr id="17" name="Shape 15"/>
+          <p:cNvSpPr/>
+          <p:nvPr/>
+        </p:nvSpPr>
+        <p:spPr>
+          <a:xfrm>
+            <a:off x="256032" y="3675888"/>
+            <a:ext cx="3051936" cy="1627632"/>
           </a:xfrm>
           <a:prstGeom prst="roundRect">
             <a:avLst>
-              <a:gd name="adj" fmla="val 6522"/>
+              <a:gd name="adj" fmla="val 2809"/>
             </a:avLst>
           </a:prstGeom>
           <a:solidFill>
@@ -3799,14 +4462,14 @@
       </p:sp>
       <p:sp>
         <p:nvSpPr>
-          <p:cNvPr id="7" name="Text 5"/>
-          <p:cNvSpPr/>
-          <p:nvPr/>
-        </p:nvSpPr>
-        <p:spPr>
-          <a:xfrm>
-            <a:off x="384048" y="1865376"/>
-            <a:ext cx="2795904" cy="164592"/>
+          <p:cNvPr id="18" name="Text 16"/>
+          <p:cNvSpPr/>
+          <p:nvPr/>
+        </p:nvSpPr>
+        <p:spPr>
+          <a:xfrm>
+            <a:off x="374904" y="3749040"/>
+            <a:ext cx="2814192" cy="164592"/>
           </a:xfrm>
           <a:prstGeom prst="rect">
             <a:avLst/>
@@ -3822,7 +4485,7 @@
               <a:buNone/>
             </a:pPr>
             <a:r>
-              <a:rPr lang="en-US" sz="750" b="1" spc="100" kern="0" dirty="0">
+              <a:rPr lang="en-US" sz="800" b="1" spc="120" kern="0" dirty="0">
                 <a:solidFill>
                   <a:srgbClr val="4659FF"/>
                 </a:solidFill>
@@ -3830,22 +4493,398 @@
                 <a:ea typeface="Calibri" pitchFamily="34" charset="-122"/>
                 <a:cs typeface="Calibri" pitchFamily="34" charset="-120"/>
               </a:rPr>
-              <a:t>★ CARRO-CHEFE</a:t>
-            </a:r>
-            <a:endParaRPr lang="en-US" sz="750" dirty="0"/>
-          </a:p>
-        </p:txBody>
-      </p:sp>
-      <p:sp>
-        <p:nvSpPr>
-          <p:cNvPr id="8" name="Text 6"/>
-          <p:cNvSpPr/>
-          <p:nvPr/>
-        </p:nvSpPr>
-        <p:spPr>
-          <a:xfrm>
-            <a:off x="384048" y="2048256"/>
-            <a:ext cx="2795904" cy="237744"/>
+              <a:t>O QUE CHEGA PRONTO</a:t>
+            </a:r>
+            <a:endParaRPr lang="en-US" sz="800" dirty="0"/>
+          </a:p>
+        </p:txBody>
+      </p:sp>
+      <p:sp>
+        <p:nvSpPr>
+          <p:cNvPr id="19" name="Text 17"/>
+          <p:cNvSpPr/>
+          <p:nvPr/>
+        </p:nvSpPr>
+        <p:spPr>
+          <a:xfrm>
+            <a:off x="374904" y="3950208"/>
+            <a:ext cx="2814192" cy="219456"/>
+          </a:xfrm>
+          <a:prstGeom prst="rect">
+            <a:avLst/>
+          </a:prstGeom>
+          <a:noFill/>
+          <a:ln/>
+        </p:spPr>
+        <p:txBody>
+          <a:bodyPr wrap="square" lIns="0" tIns="0" rIns="0" bIns="0" rtlCol="0" anchor="t"/>
+          <a:lstStyle/>
+          <a:p>
+            <a:pPr indent="0" marL="0">
+              <a:lnSpc>
+                <a:spcPts val="1050"/>
+              </a:lnSpc>
+              <a:buNone/>
+            </a:pPr>
+            <a:r>
+              <a:rPr lang="en-US" sz="880" b="1" dirty="0">
+                <a:solidFill>
+                  <a:srgbClr val="10B981"/>
+                </a:solidFill>
+                <a:latin typeface="Calibri" pitchFamily="34" charset="0"/>
+                <a:ea typeface="Calibri" pitchFamily="34" charset="-122"/>
+                <a:cs typeface="Calibri" pitchFamily="34" charset="-120"/>
+              </a:rPr>
+              <a:t>✓  </a:t>
+            </a:r>
+            <a:pPr indent="0" marL="0">
+              <a:lnSpc>
+                <a:spcPts val="1050"/>
+              </a:lnSpc>
+              <a:buNone/>
+            </a:pPr>
+            <a:r>
+              <a:rPr lang="en-US" sz="880" dirty="0">
+                <a:solidFill>
+                  <a:srgbClr val="180E4E"/>
+                </a:solidFill>
+                <a:latin typeface="Calibri" pitchFamily="34" charset="0"/>
+                <a:ea typeface="Calibri" pitchFamily="34" charset="-122"/>
+                <a:cs typeface="Calibri" pitchFamily="34" charset="-120"/>
+              </a:rPr>
+              <a:t>Plano de aula com objetivos, metodologia e avaliação</a:t>
+            </a:r>
+            <a:endParaRPr lang="en-US" sz="880" dirty="0"/>
+          </a:p>
+        </p:txBody>
+      </p:sp>
+      <p:sp>
+        <p:nvSpPr>
+          <p:cNvPr id="20" name="Text 18"/>
+          <p:cNvSpPr/>
+          <p:nvPr/>
+        </p:nvSpPr>
+        <p:spPr>
+          <a:xfrm>
+            <a:off x="374904" y="4169664"/>
+            <a:ext cx="2814192" cy="219456"/>
+          </a:xfrm>
+          <a:prstGeom prst="rect">
+            <a:avLst/>
+          </a:prstGeom>
+          <a:noFill/>
+          <a:ln/>
+        </p:spPr>
+        <p:txBody>
+          <a:bodyPr wrap="square" lIns="0" tIns="0" rIns="0" bIns="0" rtlCol="0" anchor="t"/>
+          <a:lstStyle/>
+          <a:p>
+            <a:pPr indent="0" marL="0">
+              <a:lnSpc>
+                <a:spcPts val="1050"/>
+              </a:lnSpc>
+              <a:buNone/>
+            </a:pPr>
+            <a:r>
+              <a:rPr lang="en-US" sz="880" b="1" dirty="0">
+                <a:solidFill>
+                  <a:srgbClr val="10B981"/>
+                </a:solidFill>
+                <a:latin typeface="Calibri" pitchFamily="34" charset="0"/>
+                <a:ea typeface="Calibri" pitchFamily="34" charset="-122"/>
+                <a:cs typeface="Calibri" pitchFamily="34" charset="-120"/>
+              </a:rPr>
+              <a:t>✓  </a:t>
+            </a:r>
+            <a:pPr indent="0" marL="0">
+              <a:lnSpc>
+                <a:spcPts val="1050"/>
+              </a:lnSpc>
+              <a:buNone/>
+            </a:pPr>
+            <a:r>
+              <a:rPr lang="en-US" sz="880" dirty="0">
+                <a:solidFill>
+                  <a:srgbClr val="180E4E"/>
+                </a:solidFill>
+                <a:latin typeface="Calibri" pitchFamily="34" charset="0"/>
+                <a:ea typeface="Calibri" pitchFamily="34" charset="-122"/>
+                <a:cs typeface="Calibri" pitchFamily="34" charset="-120"/>
+              </a:rPr>
+              <a:t>As habilidades da BNCC daquele ano, conferidas uma a uma</a:t>
+            </a:r>
+            <a:endParaRPr lang="en-US" sz="880" dirty="0"/>
+          </a:p>
+        </p:txBody>
+      </p:sp>
+      <p:sp>
+        <p:nvSpPr>
+          <p:cNvPr id="21" name="Text 19"/>
+          <p:cNvSpPr/>
+          <p:nvPr/>
+        </p:nvSpPr>
+        <p:spPr>
+          <a:xfrm>
+            <a:off x="374904" y="4389120"/>
+            <a:ext cx="2814192" cy="219456"/>
+          </a:xfrm>
+          <a:prstGeom prst="rect">
+            <a:avLst/>
+          </a:prstGeom>
+          <a:noFill/>
+          <a:ln/>
+        </p:spPr>
+        <p:txBody>
+          <a:bodyPr wrap="square" lIns="0" tIns="0" rIns="0" bIns="0" rtlCol="0" anchor="t"/>
+          <a:lstStyle/>
+          <a:p>
+            <a:pPr indent="0" marL="0">
+              <a:lnSpc>
+                <a:spcPts val="1050"/>
+              </a:lnSpc>
+              <a:buNone/>
+            </a:pPr>
+            <a:r>
+              <a:rPr lang="en-US" sz="880" b="1" dirty="0">
+                <a:solidFill>
+                  <a:srgbClr val="10B981"/>
+                </a:solidFill>
+                <a:latin typeface="Calibri" pitchFamily="34" charset="0"/>
+                <a:ea typeface="Calibri" pitchFamily="34" charset="-122"/>
+                <a:cs typeface="Calibri" pitchFamily="34" charset="-120"/>
+              </a:rPr>
+              <a:t>✓  </a:t>
+            </a:r>
+            <a:pPr indent="0" marL="0">
+              <a:lnSpc>
+                <a:spcPts val="1050"/>
+              </a:lnSpc>
+              <a:buNone/>
+            </a:pPr>
+            <a:r>
+              <a:rPr lang="en-US" sz="880" dirty="0">
+                <a:solidFill>
+                  <a:srgbClr val="180E4E"/>
+                </a:solidFill>
+                <a:latin typeface="Calibri" pitchFamily="34" charset="0"/>
+                <a:ea typeface="Calibri" pitchFamily="34" charset="-122"/>
+                <a:cs typeface="Calibri" pitchFamily="34" charset="-120"/>
+              </a:rPr>
+              <a:t>Prova com gabarito: objetiva, discursiva ou mista</a:t>
+            </a:r>
+            <a:endParaRPr lang="en-US" sz="880" dirty="0"/>
+          </a:p>
+        </p:txBody>
+      </p:sp>
+      <p:sp>
+        <p:nvSpPr>
+          <p:cNvPr id="22" name="Text 20"/>
+          <p:cNvSpPr/>
+          <p:nvPr/>
+        </p:nvSpPr>
+        <p:spPr>
+          <a:xfrm>
+            <a:off x="374904" y="4608576"/>
+            <a:ext cx="2814192" cy="219456"/>
+          </a:xfrm>
+          <a:prstGeom prst="rect">
+            <a:avLst/>
+          </a:prstGeom>
+          <a:noFill/>
+          <a:ln/>
+        </p:spPr>
+        <p:txBody>
+          <a:bodyPr wrap="square" lIns="0" tIns="0" rIns="0" bIns="0" rtlCol="0" anchor="t"/>
+          <a:lstStyle/>
+          <a:p>
+            <a:pPr indent="0" marL="0">
+              <a:lnSpc>
+                <a:spcPts val="1050"/>
+              </a:lnSpc>
+              <a:buNone/>
+            </a:pPr>
+            <a:r>
+              <a:rPr lang="en-US" sz="880" b="1" dirty="0">
+                <a:solidFill>
+                  <a:srgbClr val="10B981"/>
+                </a:solidFill>
+                <a:latin typeface="Calibri" pitchFamily="34" charset="0"/>
+                <a:ea typeface="Calibri" pitchFamily="34" charset="-122"/>
+                <a:cs typeface="Calibri" pitchFamily="34" charset="-120"/>
+              </a:rPr>
+              <a:t>✓  </a:t>
+            </a:r>
+            <a:pPr indent="0" marL="0">
+              <a:lnSpc>
+                <a:spcPts val="1050"/>
+              </a:lnSpc>
+              <a:buNone/>
+            </a:pPr>
+            <a:r>
+              <a:rPr lang="en-US" sz="880" dirty="0">
+                <a:solidFill>
+                  <a:srgbClr val="180E4E"/>
+                </a:solidFill>
+                <a:latin typeface="Calibri" pitchFamily="34" charset="0"/>
+                <a:ea typeface="Calibri" pitchFamily="34" charset="-122"/>
+                <a:cs typeface="Calibri" pitchFamily="34" charset="-120"/>
+              </a:rPr>
+              <a:t>Atividade impressa, pronta para distribuir na sala</a:t>
+            </a:r>
+            <a:endParaRPr lang="en-US" sz="880" dirty="0"/>
+          </a:p>
+        </p:txBody>
+      </p:sp>
+      <p:sp>
+        <p:nvSpPr>
+          <p:cNvPr id="23" name="Text 21"/>
+          <p:cNvSpPr/>
+          <p:nvPr/>
+        </p:nvSpPr>
+        <p:spPr>
+          <a:xfrm>
+            <a:off x="374904" y="4828032"/>
+            <a:ext cx="2814192" cy="219456"/>
+          </a:xfrm>
+          <a:prstGeom prst="rect">
+            <a:avLst/>
+          </a:prstGeom>
+          <a:noFill/>
+          <a:ln/>
+        </p:spPr>
+        <p:txBody>
+          <a:bodyPr wrap="square" lIns="0" tIns="0" rIns="0" bIns="0" rtlCol="0" anchor="t"/>
+          <a:lstStyle/>
+          <a:p>
+            <a:pPr indent="0" marL="0">
+              <a:lnSpc>
+                <a:spcPts val="1050"/>
+              </a:lnSpc>
+              <a:buNone/>
+            </a:pPr>
+            <a:r>
+              <a:rPr lang="en-US" sz="880" b="1" dirty="0">
+                <a:solidFill>
+                  <a:srgbClr val="10B981"/>
+                </a:solidFill>
+                <a:latin typeface="Calibri" pitchFamily="34" charset="0"/>
+                <a:ea typeface="Calibri" pitchFamily="34" charset="-122"/>
+                <a:cs typeface="Calibri" pitchFamily="34" charset="-120"/>
+              </a:rPr>
+              <a:t>✓  </a:t>
+            </a:r>
+            <a:pPr indent="0" marL="0">
+              <a:lnSpc>
+                <a:spcPts val="1050"/>
+              </a:lnSpc>
+              <a:buNone/>
+            </a:pPr>
+            <a:r>
+              <a:rPr lang="en-US" sz="880" dirty="0">
+                <a:solidFill>
+                  <a:srgbClr val="180E4E"/>
+                </a:solidFill>
+                <a:latin typeface="Calibri" pitchFamily="34" charset="0"/>
+                <a:ea typeface="Calibri" pitchFamily="34" charset="-122"/>
+                <a:cs typeface="Calibri" pitchFamily="34" charset="-120"/>
+              </a:rPr>
+              <a:t>Slides com imagens, prontos para o projetor</a:t>
+            </a:r>
+            <a:endParaRPr lang="en-US" sz="880" dirty="0"/>
+          </a:p>
+        </p:txBody>
+      </p:sp>
+      <p:sp>
+        <p:nvSpPr>
+          <p:cNvPr id="24" name="Text 22"/>
+          <p:cNvSpPr/>
+          <p:nvPr/>
+        </p:nvSpPr>
+        <p:spPr>
+          <a:xfrm>
+            <a:off x="374904" y="5047488"/>
+            <a:ext cx="2814192" cy="219456"/>
+          </a:xfrm>
+          <a:prstGeom prst="rect">
+            <a:avLst/>
+          </a:prstGeom>
+          <a:noFill/>
+          <a:ln/>
+        </p:spPr>
+        <p:txBody>
+          <a:bodyPr wrap="square" lIns="0" tIns="0" rIns="0" bIns="0" rtlCol="0" anchor="t"/>
+          <a:lstStyle/>
+          <a:p>
+            <a:pPr indent="0" marL="0">
+              <a:lnSpc>
+                <a:spcPts val="1050"/>
+              </a:lnSpc>
+              <a:buNone/>
+            </a:pPr>
+            <a:r>
+              <a:rPr lang="en-US" sz="880" b="1" dirty="0">
+                <a:solidFill>
+                  <a:srgbClr val="10B981"/>
+                </a:solidFill>
+                <a:latin typeface="Calibri" pitchFamily="34" charset="0"/>
+                <a:ea typeface="Calibri" pitchFamily="34" charset="-122"/>
+                <a:cs typeface="Calibri" pitchFamily="34" charset="-120"/>
+              </a:rPr>
+              <a:t>✓  </a:t>
+            </a:r>
+            <a:pPr indent="0" marL="0">
+              <a:lnSpc>
+                <a:spcPts val="1050"/>
+              </a:lnSpc>
+              <a:buNone/>
+            </a:pPr>
+            <a:r>
+              <a:rPr lang="en-US" sz="880" dirty="0">
+                <a:solidFill>
+                  <a:srgbClr val="180E4E"/>
+                </a:solidFill>
+                <a:latin typeface="Calibri" pitchFamily="34" charset="0"/>
+                <a:ea typeface="Calibri" pitchFamily="34" charset="-122"/>
+                <a:cs typeface="Calibri" pitchFamily="34" charset="-120"/>
+              </a:rPr>
+              <a:t>Jogo do conteúdo, para imprimir ou passar na TV</a:t>
+            </a:r>
+            <a:endParaRPr lang="en-US" sz="880" dirty="0"/>
+          </a:p>
+        </p:txBody>
+      </p:sp>
+      <p:sp>
+        <p:nvSpPr>
+          <p:cNvPr id="25" name="Shape 23"/>
+          <p:cNvSpPr/>
+          <p:nvPr/>
+        </p:nvSpPr>
+        <p:spPr>
+          <a:xfrm>
+            <a:off x="256032" y="6188400"/>
+            <a:ext cx="3051936" cy="1097280"/>
+          </a:xfrm>
+          <a:prstGeom prst="roundRect">
+            <a:avLst>
+              <a:gd name="adj" fmla="val 5000"/>
+            </a:avLst>
+          </a:prstGeom>
+          <a:solidFill>
+            <a:srgbClr val="180E4E"/>
+          </a:solidFill>
+          <a:ln/>
+        </p:spPr>
+      </p:sp>
+      <p:sp>
+        <p:nvSpPr>
+          <p:cNvPr id="26" name="Text 24"/>
+          <p:cNvSpPr/>
+          <p:nvPr/>
+        </p:nvSpPr>
+        <p:spPr>
+          <a:xfrm>
+            <a:off x="384048" y="6261552"/>
+            <a:ext cx="1005840" cy="384048"/>
           </a:xfrm>
           <a:prstGeom prst="rect">
             <a:avLst/>
@@ -3861,30 +4900,30 @@
               <a:buNone/>
             </a:pPr>
             <a:r>
-              <a:rPr lang="en-US" sz="1250" b="1" dirty="0">
-                <a:solidFill>
-                  <a:srgbClr val="180E4E"/>
+              <a:rPr lang="en-US" sz="2200" b="1" dirty="0">
+                <a:solidFill>
+                  <a:srgbClr val="F5C842"/>
                 </a:solidFill>
                 <a:latin typeface="Cambria" pitchFamily="34" charset="0"/>
                 <a:ea typeface="Cambria" pitchFamily="34" charset="-122"/>
                 <a:cs typeface="Cambria" pitchFamily="34" charset="-120"/>
               </a:rPr>
-              <a:t>Planejador</a:t>
-            </a:r>
-            <a:endParaRPr lang="en-US" sz="1250" dirty="0"/>
-          </a:p>
-        </p:txBody>
-      </p:sp>
-      <p:sp>
-        <p:nvSpPr>
-          <p:cNvPr id="9" name="Text 7"/>
-          <p:cNvSpPr/>
-          <p:nvPr/>
-        </p:nvSpPr>
-        <p:spPr>
-          <a:xfrm>
-            <a:off x="384048" y="2295144"/>
-            <a:ext cx="2795904" cy="256032"/>
+              <a:t>1.580</a:t>
+            </a:r>
+            <a:endParaRPr lang="en-US" sz="2200" dirty="0"/>
+          </a:p>
+        </p:txBody>
+      </p:sp>
+      <p:sp>
+        <p:nvSpPr>
+          <p:cNvPr id="27" name="Text 25"/>
+          <p:cNvSpPr/>
+          <p:nvPr/>
+        </p:nvSpPr>
+        <p:spPr>
+          <a:xfrm>
+            <a:off x="384048" y="6627312"/>
+            <a:ext cx="2795904" cy="585216"/>
           </a:xfrm>
           <a:prstGeom prst="rect">
             <a:avLst/>
@@ -3898,20 +4937,77 @@
           <a:p>
             <a:pPr indent="0" marL="0">
               <a:lnSpc>
-                <a:spcPts val="1200"/>
+                <a:spcPts val="1050"/>
               </a:lnSpc>
               <a:buNone/>
             </a:pPr>
             <a:r>
-              <a:rPr lang="en-US" sz="900" dirty="0">
-                <a:solidFill>
-                  <a:srgbClr val="5B6070"/>
-                </a:solidFill>
-                <a:latin typeface="Calibri" pitchFamily="34" charset="0"/>
-                <a:ea typeface="Calibri" pitchFamily="34" charset="-122"/>
-                <a:cs typeface="Calibri" pitchFamily="34" charset="-120"/>
-              </a:rPr>
-              <a:t>Digite o tema e a turma. Volta o plano inteiro, com os tempos ajustados à duração real da sua aula, mais prova, slides e sequência didática.</a:t>
+              <a:rPr lang="en-US" sz="800" b="1" dirty="0">
+                <a:solidFill>
+                  <a:srgbClr val="FFFFFF"/>
+                </a:solidFill>
+                <a:latin typeface="Calibri" pitchFamily="34" charset="0"/>
+                <a:ea typeface="Calibri" pitchFamily="34" charset="-122"/>
+                <a:cs typeface="Calibri" pitchFamily="34" charset="-120"/>
+              </a:rPr>
+              <a:t>habilidades da BNCC conferidas contra o documento oficial do MEC.
+</a:t>
+            </a:r>
+            <a:pPr indent="0" marL="0">
+              <a:lnSpc>
+                <a:spcPts val="1050"/>
+              </a:lnSpc>
+              <a:buNone/>
+            </a:pPr>
+            <a:r>
+              <a:rPr lang="en-US" sz="800" dirty="0">
+                <a:solidFill>
+                  <a:srgbClr val="C7CBEE"/>
+                </a:solidFill>
+                <a:latin typeface="Calibri" pitchFamily="34" charset="0"/>
+                <a:ea typeface="Calibri" pitchFamily="34" charset="-122"/>
+                <a:cs typeface="Calibri" pitchFamily="34" charset="-120"/>
+              </a:rPr>
+              <a:t>Todo aplicativo diz que é “alinhado à BNCC”. Aqui cada código é comparado antes de chegar em você, e o que não bate é refeito. Seu plano não chega com habilidade inventada.</a:t>
+            </a:r>
+            <a:endParaRPr lang="en-US" sz="800" dirty="0"/>
+          </a:p>
+        </p:txBody>
+      </p:sp>
+      <p:sp>
+        <p:nvSpPr>
+          <p:cNvPr id="28" name="Text 26"/>
+          <p:cNvSpPr/>
+          <p:nvPr/>
+        </p:nvSpPr>
+        <p:spPr>
+          <a:xfrm>
+            <a:off x="3820032" y="292608"/>
+            <a:ext cx="3051936" cy="201168"/>
+          </a:xfrm>
+          <a:prstGeom prst="rect">
+            <a:avLst/>
+          </a:prstGeom>
+          <a:noFill/>
+          <a:ln/>
+        </p:spPr>
+        <p:txBody>
+          <a:bodyPr wrap="square" lIns="0" tIns="0" rIns="0" bIns="0" rtlCol="0" anchor="ctr"/>
+          <a:lstStyle/>
+          <a:p>
+            <a:pPr indent="0" marL="0">
+              <a:buNone/>
+            </a:pPr>
+            <a:r>
+              <a:rPr lang="en-US" sz="900" b="1" spc="150" kern="0" dirty="0">
+                <a:solidFill>
+                  <a:srgbClr val="4659FF"/>
+                </a:solidFill>
+                <a:latin typeface="Calibri" pitchFamily="34" charset="0"/>
+                <a:ea typeface="Calibri" pitchFamily="34" charset="-122"/>
+                <a:cs typeface="Calibri" pitchFamily="34" charset="-120"/>
+              </a:rPr>
+              <a:t>ALÉM DA AULA</a:t>
             </a:r>
             <a:endParaRPr lang="en-US" sz="900" dirty="0"/>
           </a:p>
@@ -3919,18 +5015,114 @@
       </p:sp>
       <p:sp>
         <p:nvSpPr>
-          <p:cNvPr id="10" name="Shape 8"/>
-          <p:cNvSpPr/>
-          <p:nvPr/>
-        </p:nvSpPr>
-        <p:spPr>
-          <a:xfrm>
-            <a:off x="256032" y="2697480"/>
-            <a:ext cx="3051936" cy="841248"/>
+          <p:cNvPr id="29" name="Text 27"/>
+          <p:cNvSpPr/>
+          <p:nvPr/>
+        </p:nvSpPr>
+        <p:spPr>
+          <a:xfrm>
+            <a:off x="3820032" y="530352"/>
+            <a:ext cx="3051936" cy="274320"/>
+          </a:xfrm>
+          <a:prstGeom prst="rect">
+            <a:avLst/>
+          </a:prstGeom>
+          <a:noFill/>
+          <a:ln/>
+        </p:spPr>
+        <p:txBody>
+          <a:bodyPr wrap="square" lIns="0" tIns="0" rIns="0" bIns="0" rtlCol="0" anchor="ctr"/>
+          <a:lstStyle/>
+          <a:p>
+            <a:pPr indent="0" marL="0">
+              <a:lnSpc>
+                <a:spcPts val="1674"/>
+              </a:lnSpc>
+              <a:buNone/>
+            </a:pPr>
+            <a:r>
+              <a:rPr lang="en-US" sz="1550" b="1" dirty="0">
+                <a:solidFill>
+                  <a:srgbClr val="180E4E"/>
+                </a:solidFill>
+                <a:latin typeface="Cambria" pitchFamily="34" charset="0"/>
+                <a:ea typeface="Cambria" pitchFamily="34" charset="-122"/>
+                <a:cs typeface="Cambria" pitchFamily="34" charset="-120"/>
+              </a:rPr>
+              <a:t>O domingo que ele</a:t>
+            </a:r>
+            <a:endParaRPr lang="en-US" sz="1550" dirty="0"/>
+          </a:p>
+        </p:txBody>
+      </p:sp>
+      <p:sp>
+        <p:nvSpPr>
+          <p:cNvPr id="30" name="Text 28"/>
+          <p:cNvSpPr/>
+          <p:nvPr/>
+        </p:nvSpPr>
+        <p:spPr>
+          <a:xfrm rot="120000">
+            <a:off x="3820032" y="841248"/>
+            <a:ext cx="1325880" cy="329184"/>
           </a:xfrm>
           <a:prstGeom prst="roundRect">
             <a:avLst>
-              <a:gd name="adj" fmla="val 6522"/>
+              <a:gd name="adj" fmla="val 22222"/>
+            </a:avLst>
+          </a:prstGeom>
+          <a:solidFill>
+            <a:srgbClr val="F5C842"/>
+          </a:solidFill>
+          <a:ln w="31750">
+            <a:solidFill>
+              <a:srgbClr val="180E4E"/>
+            </a:solidFill>
+          </a:ln>
+          <a:effectLst>
+            <a:outerShdw sx="100000" sy="100000" kx="0" ky="0" algn="bl" rotWithShape="0" blurRad="101600" dist="63500" dir="2700000">
+              <a:srgbClr val="180E4E">
+                <a:alpha val="85000"/>
+              </a:srgbClr>
+            </a:outerShdw>
+          </a:effectLst>
+        </p:spPr>
+        <p:txBody>
+          <a:bodyPr wrap="square" lIns="508" tIns="508" rIns="508" bIns="508" rtlCol="0" anchor="ctr"/>
+          <a:lstStyle/>
+          <a:p>
+            <a:pPr algn="ctr" indent="0" marL="0">
+              <a:buNone/>
+            </a:pPr>
+            <a:r>
+              <a:rPr lang="en-US" sz="1300" b="1" dirty="0">
+                <a:solidFill>
+                  <a:srgbClr val="180E4E"/>
+                </a:solidFill>
+                <a:latin typeface="Cambria" pitchFamily="34" charset="0"/>
+                <a:ea typeface="Cambria" pitchFamily="34" charset="-122"/>
+                <a:cs typeface="Cambria" pitchFamily="34" charset="-120"/>
+              </a:rPr>
+              <a:t>devolve.</a:t>
+            </a:r>
+            <a:endParaRPr lang="en-US" sz="1300" dirty="0"/>
+          </a:p>
+        </p:txBody>
+      </p:sp>
+      <p:sp>
+        <p:nvSpPr>
+          <p:cNvPr id="31" name="Shape 29"/>
+          <p:cNvSpPr/>
+          <p:nvPr/>
+        </p:nvSpPr>
+        <p:spPr>
+          <a:xfrm>
+            <a:off x="3820032" y="1353312"/>
+            <a:ext cx="3051936" cy="914400"/>
+          </a:xfrm>
+          <a:prstGeom prst="roundRect">
+            <a:avLst>
+              <a:gd name="adj" fmla="val 6000"/>
             </a:avLst>
           </a:prstGeom>
           <a:solidFill>
@@ -3946,13 +5138,13 @@
       </p:sp>
       <p:sp>
         <p:nvSpPr>
-          <p:cNvPr id="11" name="Text 9"/>
-          <p:cNvSpPr/>
-          <p:nvPr/>
-        </p:nvSpPr>
-        <p:spPr>
-          <a:xfrm>
-            <a:off x="384048" y="2779776"/>
+          <p:cNvPr id="32" name="Text 30"/>
+          <p:cNvSpPr/>
+          <p:nvPr/>
+        </p:nvSpPr>
+        <p:spPr>
+          <a:xfrm>
+            <a:off x="3948048" y="1435608"/>
             <a:ext cx="2795904" cy="164592"/>
           </a:xfrm>
           <a:prstGeom prst="rect">
@@ -3977,7 +5169,7 @@
                 <a:ea typeface="Calibri" pitchFamily="34" charset="-122"/>
                 <a:cs typeface="Calibri" pitchFamily="34" charset="-120"/>
               </a:rPr>
-              <a:t>TURMA GAMIFICADA</a:t>
+              <a:t>AGENDA E DIÁRIO DE CLASSE</a:t>
             </a:r>
             <a:endParaRPr lang="en-US" sz="750" dirty="0"/>
           </a:p>
@@ -3985,13 +5177,13 @@
       </p:sp>
       <p:sp>
         <p:nvSpPr>
-          <p:cNvPr id="12" name="Text 10"/>
-          <p:cNvSpPr/>
-          <p:nvPr/>
-        </p:nvSpPr>
-        <p:spPr>
-          <a:xfrm>
-            <a:off x="384048" y="2962656"/>
+          <p:cNvPr id="33" name="Text 31"/>
+          <p:cNvSpPr/>
+          <p:nvPr/>
+        </p:nvSpPr>
+        <p:spPr>
+          <a:xfrm>
+            <a:off x="3948048" y="1618488"/>
             <a:ext cx="2795904" cy="237744"/>
           </a:xfrm>
           <a:prstGeom prst="rect">
@@ -4016,7 +5208,7 @@
                 <a:ea typeface="Cambria" pitchFamily="34" charset="-122"/>
                 <a:cs typeface="Cambria" pitchFamily="34" charset="-120"/>
               </a:rPr>
-              <a:t>O comportamento vira ponto</a:t>
+              <a:t>O ano letivo a partir de um PDF</a:t>
             </a:r>
             <a:endParaRPr lang="en-US" sz="1250" dirty="0"/>
           </a:p>
@@ -4024,14 +5216,14 @@
       </p:sp>
       <p:sp>
         <p:nvSpPr>
-          <p:cNvPr id="13" name="Text 11"/>
-          <p:cNvSpPr/>
-          <p:nvPr/>
-        </p:nvSpPr>
-        <p:spPr>
-          <a:xfrm>
-            <a:off x="384048" y="3209544"/>
-            <a:ext cx="2795904" cy="256032"/>
+          <p:cNvPr id="34" name="Text 32"/>
+          <p:cNvSpPr/>
+          <p:nvPr/>
+        </p:nvSpPr>
+        <p:spPr>
+          <a:xfrm>
+            <a:off x="3948048" y="1865376"/>
+            <a:ext cx="2795904" cy="329184"/>
           </a:xfrm>
           <a:prstGeom prst="rect">
             <a:avLst/>
@@ -4058,7 +5250,7 @@
                 <a:ea typeface="Calibri" pitchFamily="34" charset="-122"/>
                 <a:cs typeface="Calibri" pitchFamily="34" charset="-120"/>
               </a:rPr>
-              <a:t>XP, moedas, níveis, equipes e missões da semana. A loja não dá prêmio material: dá ser ajudante do dia ou escolher a música da aula.</a:t>
+              <a:t>Você manda o calendário da escola em PDF e ele preenche feriados, recessos e reuniões sozinho. Chamada, anotações e notas por aluno ficam no mesmo lugar.</a:t>
             </a:r>
             <a:endParaRPr lang="en-US" sz="900" dirty="0"/>
           </a:p>
@@ -4066,18 +5258,18 @@
       </p:sp>
       <p:sp>
         <p:nvSpPr>
-          <p:cNvPr id="14" name="Shape 12"/>
-          <p:cNvSpPr/>
-          <p:nvPr/>
-        </p:nvSpPr>
-        <p:spPr>
-          <a:xfrm>
-            <a:off x="256032" y="3611880"/>
-            <a:ext cx="3051936" cy="841248"/>
+          <p:cNvPr id="35" name="Shape 33"/>
+          <p:cNvSpPr/>
+          <p:nvPr/>
+        </p:nvSpPr>
+        <p:spPr>
+          <a:xfrm>
+            <a:off x="3820032" y="2340864"/>
+            <a:ext cx="3051936" cy="914400"/>
           </a:xfrm>
           <a:prstGeom prst="roundRect">
             <a:avLst>
-              <a:gd name="adj" fmla="val 6522"/>
+              <a:gd name="adj" fmla="val 6000"/>
             </a:avLst>
           </a:prstGeom>
           <a:solidFill>
@@ -4093,13 +5285,13 @@
       </p:sp>
       <p:sp>
         <p:nvSpPr>
-          <p:cNvPr id="15" name="Text 13"/>
-          <p:cNvSpPr/>
-          <p:nvPr/>
-        </p:nvSpPr>
-        <p:spPr>
-          <a:xfrm>
-            <a:off x="384048" y="3694176"/>
+          <p:cNvPr id="36" name="Text 34"/>
+          <p:cNvSpPr/>
+          <p:nvPr/>
+        </p:nvSpPr>
+        <p:spPr>
+          <a:xfrm>
+            <a:off x="3948048" y="2423160"/>
             <a:ext cx="2795904" cy="164592"/>
           </a:xfrm>
           <a:prstGeom prst="rect">
@@ -4124,7 +5316,7 @@
                 <a:ea typeface="Calibri" pitchFamily="34" charset="-122"/>
                 <a:cs typeface="Calibri" pitchFamily="34" charset="-120"/>
               </a:rPr>
-              <a:t>CHAT PEDAGÓGICO</a:t>
+              <a:t>KIT DO PROFESSOR</a:t>
             </a:r>
             <a:endParaRPr lang="en-US" sz="750" dirty="0"/>
           </a:p>
@@ -4132,13 +5324,13 @@
       </p:sp>
       <p:sp>
         <p:nvSpPr>
-          <p:cNvPr id="16" name="Text 14"/>
-          <p:cNvSpPr/>
-          <p:nvPr/>
-        </p:nvSpPr>
-        <p:spPr>
-          <a:xfrm>
-            <a:off x="384048" y="3877056"/>
+          <p:cNvPr id="37" name="Text 35"/>
+          <p:cNvSpPr/>
+          <p:nvPr/>
+        </p:nvSpPr>
+        <p:spPr>
+          <a:xfrm>
+            <a:off x="3948048" y="2606040"/>
             <a:ext cx="2795904" cy="237744"/>
           </a:xfrm>
           <a:prstGeom prst="rect">
@@ -4163,7 +5355,7 @@
                 <a:ea typeface="Cambria" pitchFamily="34" charset="-122"/>
                 <a:cs typeface="Cambria" pitchFamily="34" charset="-120"/>
               </a:rPr>
-              <a:t>Um colega, não um robô</a:t>
+              <a:t>A papelada que ninguém vê</a:t>
             </a:r>
             <a:endParaRPr lang="en-US" sz="1250" dirty="0"/>
           </a:p>
@@ -4171,14 +5363,14 @@
       </p:sp>
       <p:sp>
         <p:nvSpPr>
-          <p:cNvPr id="17" name="Text 15"/>
-          <p:cNvSpPr/>
-          <p:nvPr/>
-        </p:nvSpPr>
-        <p:spPr>
-          <a:xfrm>
-            <a:off x="384048" y="4123944"/>
-            <a:ext cx="2795904" cy="256032"/>
+          <p:cNvPr id="38" name="Text 36"/>
+          <p:cNvSpPr/>
+          <p:nvPr/>
+        </p:nvSpPr>
+        <p:spPr>
+          <a:xfrm>
+            <a:off x="3948048" y="2852928"/>
+            <a:ext cx="2795904" cy="329184"/>
           </a:xfrm>
           <a:prstGeom prst="rect">
             <a:avLst/>
@@ -4205,7 +5397,7 @@
                 <a:ea typeface="Calibri" pitchFamily="34" charset="-122"/>
                 <a:cs typeface="Calibri" pitchFamily="34" charset="-120"/>
               </a:rPr>
-              <a:t>Assistente especializado em educação: tira dúvida, sugere abordagem e dá feedback sobre a sua prova. Histórico sincronizado entre dispositivos.</a:t>
+              <a:t>Lista de chamada pronta para imprimir, atividade adaptada para aluno com TDAH, TEA, dislexia ou baixa visão, rubrica de avaliação e bilhete para a família.</a:t>
             </a:r>
             <a:endParaRPr lang="en-US" sz="900" dirty="0"/>
           </a:p>
@@ -4213,139 +5405,18 @@
       </p:sp>
       <p:sp>
         <p:nvSpPr>
-          <p:cNvPr id="18" name="Shape 16"/>
-          <p:cNvSpPr/>
-          <p:nvPr/>
-        </p:nvSpPr>
-        <p:spPr>
-          <a:xfrm>
-            <a:off x="256032" y="4544568"/>
-            <a:ext cx="3051936" cy="2759400"/>
+          <p:cNvPr id="39" name="Shape 37"/>
+          <p:cNvSpPr/>
+          <p:nvPr/>
+        </p:nvSpPr>
+        <p:spPr>
+          <a:xfrm>
+            <a:off x="3820032" y="3328416"/>
+            <a:ext cx="3051936" cy="859536"/>
           </a:xfrm>
           <a:prstGeom prst="roundRect">
             <a:avLst>
-              <a:gd name="adj" fmla="val 1988"/>
-            </a:avLst>
-          </a:prstGeom>
-          <a:solidFill>
-            <a:srgbClr val="180E4E"/>
-          </a:solidFill>
-          <a:ln/>
-        </p:spPr>
-      </p:sp>
-      <p:sp>
-        <p:nvSpPr>
-          <p:cNvPr id="19" name="Text 17"/>
-          <p:cNvSpPr/>
-          <p:nvPr/>
-        </p:nvSpPr>
-        <p:spPr>
-          <a:xfrm>
-            <a:off x="384048" y="4636008"/>
-            <a:ext cx="914400" cy="2576520"/>
-          </a:xfrm>
-          <a:prstGeom prst="rect">
-            <a:avLst/>
-          </a:prstGeom>
-          <a:noFill/>
-          <a:ln/>
-        </p:spPr>
-        <p:txBody>
-          <a:bodyPr wrap="square" lIns="0" tIns="0" rIns="0" bIns="0" rtlCol="0" anchor="ctr"/>
-          <a:lstStyle/>
-          <a:p>
-            <a:pPr indent="0" marL="0">
-              <a:buNone/>
-            </a:pPr>
-            <a:r>
-              <a:rPr lang="en-US" sz="2400" b="1" dirty="0">
-                <a:solidFill>
-                  <a:srgbClr val="F5C842"/>
-                </a:solidFill>
-                <a:latin typeface="Cambria" pitchFamily="34" charset="0"/>
-                <a:ea typeface="Cambria" pitchFamily="34" charset="-122"/>
-                <a:cs typeface="Cambria" pitchFamily="34" charset="-120"/>
-              </a:rPr>
-              <a:t>1.580</a:t>
-            </a:r>
-            <a:endParaRPr lang="en-US" sz="2400" dirty="0"/>
-          </a:p>
-        </p:txBody>
-      </p:sp>
-      <p:sp>
-        <p:nvSpPr>
-          <p:cNvPr id="20" name="Text 18"/>
-          <p:cNvSpPr/>
-          <p:nvPr/>
-        </p:nvSpPr>
-        <p:spPr>
-          <a:xfrm>
-            <a:off x="1216152" y="4636008"/>
-            <a:ext cx="2000376" cy="2576520"/>
-          </a:xfrm>
-          <a:prstGeom prst="rect">
-            <a:avLst/>
-          </a:prstGeom>
-          <a:noFill/>
-          <a:ln/>
-        </p:spPr>
-        <p:txBody>
-          <a:bodyPr wrap="square" lIns="0" tIns="0" rIns="0" bIns="0" rtlCol="0" anchor="ctr"/>
-          <a:lstStyle/>
-          <a:p>
-            <a:pPr indent="0" marL="0">
-              <a:lnSpc>
-                <a:spcPts val="1050"/>
-              </a:lnSpc>
-              <a:buNone/>
-            </a:pPr>
-            <a:r>
-              <a:rPr lang="en-US" sz="800" b="1" dirty="0">
-                <a:solidFill>
-                  <a:srgbClr val="FFFFFF"/>
-                </a:solidFill>
-                <a:latin typeface="Calibri" pitchFamily="34" charset="0"/>
-                <a:ea typeface="Calibri" pitchFamily="34" charset="-122"/>
-                <a:cs typeface="Calibri" pitchFamily="34" charset="-120"/>
-              </a:rPr>
-              <a:t>habilidades da BNCC conferidas contra o documento oficial do MEC.
-</a:t>
-            </a:r>
-            <a:pPr indent="0" marL="0">
-              <a:lnSpc>
-                <a:spcPts val="1050"/>
-              </a:lnSpc>
-              <a:buNone/>
-            </a:pPr>
-            <a:r>
-              <a:rPr lang="en-US" sz="800" dirty="0">
-                <a:solidFill>
-                  <a:srgbClr val="C7CBEE"/>
-                </a:solidFill>
-                <a:latin typeface="Calibri" pitchFamily="34" charset="0"/>
-                <a:ea typeface="Calibri" pitchFamily="34" charset="-122"/>
-                <a:cs typeface="Calibri" pitchFamily="34" charset="-120"/>
-              </a:rPr>
-              <a:t>Toda IA diz que é “alinhada à BNCC”. Aqui o código é comparado antes de chegar em você, e o que não bate é reescrito.</a:t>
-            </a:r>
-            <a:endParaRPr lang="en-US" sz="800" dirty="0"/>
-          </a:p>
-        </p:txBody>
-      </p:sp>
-      <p:sp>
-        <p:nvSpPr>
-          <p:cNvPr id="21" name="Shape 19"/>
-          <p:cNvSpPr/>
-          <p:nvPr/>
-        </p:nvSpPr>
-        <p:spPr>
-          <a:xfrm>
-            <a:off x="3820032" y="292608"/>
-            <a:ext cx="3051936" cy="804672"/>
-          </a:xfrm>
-          <a:prstGeom prst="roundRect">
-            <a:avLst>
-              <a:gd name="adj" fmla="val 6818"/>
+              <a:gd name="adj" fmla="val 6383"/>
             </a:avLst>
           </a:prstGeom>
           <a:solidFill>
@@ -4361,13 +5432,13 @@
       </p:sp>
       <p:sp>
         <p:nvSpPr>
-          <p:cNvPr id="22" name="Text 20"/>
-          <p:cNvSpPr/>
-          <p:nvPr/>
-        </p:nvSpPr>
-        <p:spPr>
-          <a:xfrm>
-            <a:off x="3948048" y="374904"/>
+          <p:cNvPr id="40" name="Text 38"/>
+          <p:cNvSpPr/>
+          <p:nvPr/>
+        </p:nvSpPr>
+        <p:spPr>
+          <a:xfrm>
+            <a:off x="3948048" y="3410712"/>
             <a:ext cx="2795904" cy="164592"/>
           </a:xfrm>
           <a:prstGeom prst="rect">
@@ -4392,7 +5463,7 @@
                 <a:ea typeface="Calibri" pitchFamily="34" charset="-122"/>
                 <a:cs typeface="Calibri" pitchFamily="34" charset="-120"/>
               </a:rPr>
-              <a:t>AGENDA &amp; DIÁRIO DE BORDO</a:t>
+              <a:t>TURMA GAMIFICADA</a:t>
             </a:r>
             <a:endParaRPr lang="en-US" sz="750" dirty="0"/>
           </a:p>
@@ -4400,13 +5471,13 @@
       </p:sp>
       <p:sp>
         <p:nvSpPr>
-          <p:cNvPr id="23" name="Text 21"/>
-          <p:cNvSpPr/>
-          <p:nvPr/>
-        </p:nvSpPr>
-        <p:spPr>
-          <a:xfrm>
-            <a:off x="3948048" y="557784"/>
+          <p:cNvPr id="41" name="Text 39"/>
+          <p:cNvSpPr/>
+          <p:nvPr/>
+        </p:nvSpPr>
+        <p:spPr>
+          <a:xfrm>
+            <a:off x="3948048" y="3593592"/>
             <a:ext cx="2795904" cy="237744"/>
           </a:xfrm>
           <a:prstGeom prst="rect">
@@ -4431,7 +5502,7 @@
                 <a:ea typeface="Cambria" pitchFamily="34" charset="-122"/>
                 <a:cs typeface="Cambria" pitchFamily="34" charset="-120"/>
               </a:rPr>
-              <a:t>O ano letivo a partir de um PDF</a:t>
+              <a:t>Comportamento que vira ponto</a:t>
             </a:r>
             <a:endParaRPr lang="en-US" sz="1250" dirty="0"/>
           </a:p>
@@ -4439,14 +5510,14 @@
       </p:sp>
       <p:sp>
         <p:nvSpPr>
-          <p:cNvPr id="24" name="Text 22"/>
-          <p:cNvSpPr/>
-          <p:nvPr/>
-        </p:nvSpPr>
-        <p:spPr>
-          <a:xfrm>
-            <a:off x="3948048" y="804672"/>
-            <a:ext cx="2795904" cy="219456"/>
+          <p:cNvPr id="42" name="Text 40"/>
+          <p:cNvSpPr/>
+          <p:nvPr/>
+        </p:nvSpPr>
+        <p:spPr>
+          <a:xfrm>
+            <a:off x="3948048" y="3840480"/>
+            <a:ext cx="2795904" cy="274320"/>
           </a:xfrm>
           <a:prstGeom prst="rect">
             <a:avLst/>
@@ -4473,7 +5544,7 @@
                 <a:ea typeface="Calibri" pitchFamily="34" charset="-122"/>
                 <a:cs typeface="Calibri" pitchFamily="34" charset="-120"/>
               </a:rPr>
-              <a:t>Manda o calendário da escola em PDF e a IA preenche feriados, recessos e eventos. A ementa vira aulas distribuídas no ano.</a:t>
+              <a:t>Pontos, níveis e equipes, com as regras que você escolher. O prêmio não é material: é ser ajudante do dia ou escolher a música da aula.</a:t>
             </a:r>
             <a:endParaRPr lang="en-US" sz="900" dirty="0"/>
           </a:p>
@@ -4481,18 +5552,18 @@
       </p:sp>
       <p:sp>
         <p:nvSpPr>
-          <p:cNvPr id="25" name="Shape 23"/>
-          <p:cNvSpPr/>
-          <p:nvPr/>
-        </p:nvSpPr>
-        <p:spPr>
-          <a:xfrm>
-            <a:off x="3820032" y="1170432"/>
-            <a:ext cx="3051936" cy="804672"/>
+          <p:cNvPr id="43" name="Shape 41"/>
+          <p:cNvSpPr/>
+          <p:nvPr/>
+        </p:nvSpPr>
+        <p:spPr>
+          <a:xfrm>
+            <a:off x="3820032" y="4261104"/>
+            <a:ext cx="3051936" cy="713232"/>
           </a:xfrm>
           <a:prstGeom prst="roundRect">
             <a:avLst>
-              <a:gd name="adj" fmla="val 6818"/>
+              <a:gd name="adj" fmla="val 7692"/>
             </a:avLst>
           </a:prstGeom>
           <a:solidFill>
@@ -4508,13 +5579,13 @@
       </p:sp>
       <p:sp>
         <p:nvSpPr>
-          <p:cNvPr id="26" name="Text 24"/>
-          <p:cNvSpPr/>
-          <p:nvPr/>
-        </p:nvSpPr>
-        <p:spPr>
-          <a:xfrm>
-            <a:off x="3948048" y="1252728"/>
+          <p:cNvPr id="44" name="Text 42"/>
+          <p:cNvSpPr/>
+          <p:nvPr/>
+        </p:nvSpPr>
+        <p:spPr>
+          <a:xfrm>
+            <a:off x="3948048" y="4343400"/>
             <a:ext cx="2795904" cy="164592"/>
           </a:xfrm>
           <a:prstGeom prst="rect">
@@ -4539,7 +5610,7 @@
                 <a:ea typeface="Calibri" pitchFamily="34" charset="-122"/>
                 <a:cs typeface="Calibri" pitchFamily="34" charset="-120"/>
               </a:rPr>
-              <a:t>KIT DO PROFESSOR</a:t>
+              <a:t>SEU ACERVO</a:t>
             </a:r>
             <a:endParaRPr lang="en-US" sz="750" dirty="0"/>
           </a:p>
@@ -4547,13 +5618,13 @@
       </p:sp>
       <p:sp>
         <p:nvSpPr>
-          <p:cNvPr id="27" name="Text 25"/>
-          <p:cNvSpPr/>
-          <p:nvPr/>
-        </p:nvSpPr>
-        <p:spPr>
-          <a:xfrm>
-            <a:off x="3948048" y="1435608"/>
+          <p:cNvPr id="45" name="Text 43"/>
+          <p:cNvSpPr/>
+          <p:nvPr/>
+        </p:nvSpPr>
+        <p:spPr>
+          <a:xfrm>
+            <a:off x="3948048" y="4526280"/>
             <a:ext cx="2795904" cy="237744"/>
           </a:xfrm>
           <a:prstGeom prst="rect">
@@ -4578,7 +5649,7 @@
                 <a:ea typeface="Cambria" pitchFamily="34" charset="-122"/>
                 <a:cs typeface="Cambria" pitchFamily="34" charset="-120"/>
               </a:rPr>
-              <a:t>A burocracia do domingo</a:t>
+              <a:t>Nada se perde de um ano para o outro</a:t>
             </a:r>
             <a:endParaRPr lang="en-US" sz="1250" dirty="0"/>
           </a:p>
@@ -4586,14 +5657,14 @@
       </p:sp>
       <p:sp>
         <p:nvSpPr>
-          <p:cNvPr id="28" name="Text 26"/>
-          <p:cNvSpPr/>
-          <p:nvPr/>
-        </p:nvSpPr>
-        <p:spPr>
-          <a:xfrm>
-            <a:off x="3948048" y="1682496"/>
-            <a:ext cx="2795904" cy="219456"/>
+          <p:cNvPr id="46" name="Text 44"/>
+          <p:cNvSpPr/>
+          <p:nvPr/>
+        </p:nvSpPr>
+        <p:spPr>
+          <a:xfrm>
+            <a:off x="3948048" y="4773168"/>
+            <a:ext cx="2795904" cy="128016"/>
           </a:xfrm>
           <a:prstGeom prst="rect">
             <a:avLst/>
@@ -4620,7 +5691,7 @@
                 <a:ea typeface="Calibri" pitchFamily="34" charset="-122"/>
                 <a:cs typeface="Calibri" pitchFamily="34" charset="-120"/>
               </a:rPr>
-              <a:t>Lista de chamada, adaptação inclusiva para TDAH, TEA e dislexia, rubrica de avaliação, bilhete para a família e aula a partir de um vídeo.</a:t>
+              <a:t>Tudo o que você cria fica guardado e organizado, com busca por tipo de material.</a:t>
             </a:r>
             <a:endParaRPr lang="en-US" sz="900" dirty="0"/>
           </a:p>
@@ -4628,71 +5699,14 @@
       </p:sp>
       <p:sp>
         <p:nvSpPr>
-          <p:cNvPr id="29" name="Shape 27"/>
-          <p:cNvSpPr/>
-          <p:nvPr/>
-        </p:nvSpPr>
-        <p:spPr>
-          <a:xfrm>
-            <a:off x="3820032" y="2066544"/>
-            <a:ext cx="3051936" cy="1691640"/>
-          </a:xfrm>
-          <a:prstGeom prst="roundRect">
-            <a:avLst>
-              <a:gd name="adj" fmla="val 3243"/>
-            </a:avLst>
-          </a:prstGeom>
-          <a:solidFill>
-            <a:srgbClr val="FFFFFF"/>
-          </a:solidFill>
-          <a:ln w="25400">
-            <a:solidFill>
-              <a:srgbClr val="180E4E"/>
-            </a:solidFill>
-            <a:prstDash val="solid"/>
-          </a:ln>
-          <a:effectLst>
-            <a:outerShdw sx="100000" sy="100000" kx="0" ky="0" algn="bl" rotWithShape="0" blurRad="101600" dist="63500" dir="2700000">
-              <a:srgbClr val="180E4E">
-                <a:alpha val="20000"/>
-              </a:srgbClr>
-            </a:outerShdw>
-          </a:effectLst>
-        </p:spPr>
-      </p:sp>
-      <p:pic>
-        <p:nvPicPr>
-          <p:cNvPr id="30" name="Image 0" descr="/home/user/Site/folder/pptx/assets/illu-06a.jpg">    </p:cNvPr>
-          <p:cNvPicPr>
-            <a:picLocks noChangeAspect="1"/>
-          </p:cNvPicPr>
-          <p:nvPr/>
-        </p:nvPicPr>
-        <p:blipFill>
-          <a:blip r:embed="rId1"/>
-          <a:srcRect l="0" r="0" t="0" b="0"/>
-          <a:stretch/>
-        </p:blipFill>
-        <p:spPr>
-          <a:xfrm>
-            <a:off x="3820032" y="2066544"/>
-            <a:ext cx="3051936" cy="1234440"/>
-          </a:xfrm>
-          <a:prstGeom prst="rect">
-            <a:avLst/>
-          </a:prstGeom>
-        </p:spPr>
-      </p:pic>
-      <p:sp>
-        <p:nvSpPr>
-          <p:cNvPr id="31" name="Text 28"/>
-          <p:cNvSpPr/>
-          <p:nvPr/>
-        </p:nvSpPr>
-        <p:spPr>
-          <a:xfrm>
-            <a:off x="3911472" y="3355848"/>
-            <a:ext cx="2869056" cy="384048"/>
+          <p:cNvPr id="47" name="Text 45"/>
+          <p:cNvSpPr/>
+          <p:nvPr/>
+        </p:nvSpPr>
+        <p:spPr>
+          <a:xfrm>
+            <a:off x="3820032" y="5065776"/>
+            <a:ext cx="3051936" cy="201168"/>
           </a:xfrm>
           <a:prstGeom prst="rect">
             <a:avLst/>
@@ -4705,79 +5719,10 @@
           <a:lstStyle/>
           <a:p>
             <a:pPr indent="0" marL="0">
-              <a:lnSpc>
-                <a:spcPts val="1000"/>
-              </a:lnSpc>
-              <a:buNone/>
-            </a:pPr>
-            <a:r>
-              <a:rPr lang="en-US" sz="800" dirty="0">
-                <a:solidFill>
-                  <a:srgbClr val="5B6070"/>
-                </a:solidFill>
-                <a:latin typeface="Calibri" pitchFamily="34" charset="0"/>
-                <a:ea typeface="Calibri" pitchFamily="34" charset="-122"/>
-                <a:cs typeface="Calibri" pitchFamily="34" charset="-120"/>
-              </a:rPr>
-              <a:t>O caderno da sala de escape sai pronto para imprimir, com pistas, gabarito e cartelas.</a:t>
-            </a:r>
-            <a:endParaRPr lang="en-US" sz="800" dirty="0"/>
-          </a:p>
-        </p:txBody>
-      </p:sp>
-      <p:sp>
-        <p:nvSpPr>
-          <p:cNvPr id="32" name="Shape 29"/>
-          <p:cNvSpPr/>
-          <p:nvPr/>
-        </p:nvSpPr>
-        <p:spPr>
-          <a:xfrm>
-            <a:off x="3820032" y="3867912"/>
-            <a:ext cx="3051936" cy="548640"/>
-          </a:xfrm>
-          <a:prstGeom prst="roundRect">
-            <a:avLst>
-              <a:gd name="adj" fmla="val 10000"/>
-            </a:avLst>
-          </a:prstGeom>
-          <a:solidFill>
-            <a:srgbClr val="FFFFFF"/>
-          </a:solidFill>
-          <a:ln w="12700">
-            <a:solidFill>
-              <a:srgbClr val="E2E5F5"/>
-            </a:solidFill>
-            <a:prstDash val="solid"/>
-          </a:ln>
-        </p:spPr>
-      </p:sp>
-      <p:sp>
-        <p:nvSpPr>
-          <p:cNvPr id="33" name="Text 30"/>
-          <p:cNvSpPr/>
-          <p:nvPr/>
-        </p:nvSpPr>
-        <p:spPr>
-          <a:xfrm>
-            <a:off x="3948048" y="3950208"/>
-            <a:ext cx="2795904" cy="164592"/>
-          </a:xfrm>
-          <a:prstGeom prst="rect">
-            <a:avLst/>
-          </a:prstGeom>
-          <a:noFill/>
-          <a:ln/>
-        </p:spPr>
-        <p:txBody>
-          <a:bodyPr wrap="square" lIns="0" tIns="0" rIns="0" bIns="0" rtlCol="0" anchor="ctr"/>
-          <a:lstStyle/>
-          <a:p>
-            <a:pPr indent="0" marL="0">
-              <a:buNone/>
-            </a:pPr>
-            <a:r>
-              <a:rPr lang="en-US" sz="750" b="1" spc="100" kern="0" dirty="0">
+              <a:buNone/>
+            </a:pPr>
+            <a:r>
+              <a:rPr lang="en-US" sz="900" b="1" spc="150" kern="0" dirty="0">
                 <a:solidFill>
                   <a:srgbClr val="4659FF"/>
                 </a:solidFill>
@@ -4785,88 +5730,7 @@
                 <a:ea typeface="Calibri" pitchFamily="34" charset="-122"/>
                 <a:cs typeface="Calibri" pitchFamily="34" charset="-120"/>
               </a:rPr>
-              <a:t>ACERVO</a:t>
-            </a:r>
-            <a:endParaRPr lang="en-US" sz="750" dirty="0"/>
-          </a:p>
-        </p:txBody>
-      </p:sp>
-      <p:sp>
-        <p:nvSpPr>
-          <p:cNvPr id="34" name="Text 31"/>
-          <p:cNvSpPr/>
-          <p:nvPr/>
-        </p:nvSpPr>
-        <p:spPr>
-          <a:xfrm>
-            <a:off x="3948048" y="4133088"/>
-            <a:ext cx="2795904" cy="237744"/>
-          </a:xfrm>
-          <a:prstGeom prst="rect">
-            <a:avLst/>
-          </a:prstGeom>
-          <a:noFill/>
-          <a:ln/>
-        </p:spPr>
-        <p:txBody>
-          <a:bodyPr wrap="square" lIns="0" tIns="0" rIns="0" bIns="0" rtlCol="0" anchor="ctr"/>
-          <a:lstStyle/>
-          <a:p>
-            <a:pPr indent="0" marL="0">
-              <a:buNone/>
-            </a:pPr>
-            <a:r>
-              <a:rPr lang="en-US" sz="1250" b="1" dirty="0">
-                <a:solidFill>
-                  <a:srgbClr val="180E4E"/>
-                </a:solidFill>
-                <a:latin typeface="Cambria" pitchFamily="34" charset="0"/>
-                <a:ea typeface="Cambria" pitchFamily="34" charset="-122"/>
-                <a:cs typeface="Cambria" pitchFamily="34" charset="-120"/>
-              </a:rPr>
-              <a:t>Nada se perde entre bimestres</a:t>
-            </a:r>
-            <a:endParaRPr lang="en-US" sz="1250" dirty="0"/>
-          </a:p>
-        </p:txBody>
-      </p:sp>
-      <p:sp>
-        <p:nvSpPr>
-          <p:cNvPr id="35" name="Text 32"/>
-          <p:cNvSpPr/>
-          <p:nvPr/>
-        </p:nvSpPr>
-        <p:spPr>
-          <a:xfrm>
-            <a:off x="3948048" y="4379976"/>
-            <a:ext cx="2795904" cy="-36576"/>
-          </a:xfrm>
-          <a:prstGeom prst="rect">
-            <a:avLst/>
-          </a:prstGeom>
-          <a:noFill/>
-          <a:ln/>
-        </p:spPr>
-        <p:txBody>
-          <a:bodyPr wrap="square" lIns="0" tIns="0" rIns="0" bIns="0" rtlCol="0" anchor="t"/>
-          <a:lstStyle/>
-          <a:p>
-            <a:pPr indent="0" marL="0">
-              <a:lnSpc>
-                <a:spcPts val="1200"/>
-              </a:lnSpc>
-              <a:buNone/>
-            </a:pPr>
-            <a:r>
-              <a:rPr lang="en-US" sz="900" dirty="0">
-                <a:solidFill>
-                  <a:srgbClr val="5B6070"/>
-                </a:solidFill>
-                <a:latin typeface="Calibri" pitchFamily="34" charset="0"/>
-                <a:ea typeface="Calibri" pitchFamily="34" charset="-122"/>
-                <a:cs typeface="Calibri" pitchFamily="34" charset="-120"/>
-              </a:rPr>
-              <a:t>Biblioteca pessoal com busca e filtro, mais um acervo compartilhado com materiais curados.</a:t>
+              <a:t>NA HORA DA AULA, NO PROJETOR</a:t>
             </a:r>
             <a:endParaRPr lang="en-US" sz="900" dirty="0"/>
           </a:p>
@@ -4874,52 +5738,13 @@
       </p:sp>
       <p:sp>
         <p:nvSpPr>
-          <p:cNvPr id="36" name="Text 33"/>
-          <p:cNvSpPr/>
-          <p:nvPr/>
-        </p:nvSpPr>
-        <p:spPr>
-          <a:xfrm>
-            <a:off x="3820032" y="4507992"/>
-            <a:ext cx="3051936" cy="201168"/>
-          </a:xfrm>
-          <a:prstGeom prst="rect">
-            <a:avLst/>
-          </a:prstGeom>
-          <a:noFill/>
-          <a:ln/>
-        </p:spPr>
-        <p:txBody>
-          <a:bodyPr wrap="square" lIns="0" tIns="0" rIns="0" bIns="0" rtlCol="0" anchor="ctr"/>
-          <a:lstStyle/>
-          <a:p>
-            <a:pPr indent="0" marL="0">
-              <a:buNone/>
-            </a:pPr>
-            <a:r>
-              <a:rPr lang="en-US" sz="900" b="1" spc="150" kern="0" dirty="0">
-                <a:solidFill>
-                  <a:srgbClr val="4659FF"/>
-                </a:solidFill>
-                <a:latin typeface="Calibri" pitchFamily="34" charset="0"/>
-                <a:ea typeface="Calibri" pitchFamily="34" charset="-122"/>
-                <a:cs typeface="Calibri" pitchFamily="34" charset="-120"/>
-              </a:rPr>
-              <a:t>NA HORA DA AULA, NO PROJETOR</a:t>
-            </a:r>
-            <a:endParaRPr lang="en-US" sz="900" dirty="0"/>
-          </a:p>
-        </p:txBody>
-      </p:sp>
-      <p:sp>
-        <p:nvSpPr>
-          <p:cNvPr id="37" name="Text 34"/>
-          <p:cNvSpPr/>
-          <p:nvPr/>
-        </p:nvSpPr>
-        <p:spPr>
-          <a:xfrm>
-            <a:off x="3820032" y="4727448"/>
+          <p:cNvPr id="48" name="Text 46"/>
+          <p:cNvSpPr/>
+          <p:nvPr/>
+        </p:nvSpPr>
+        <p:spPr>
+          <a:xfrm>
+            <a:off x="3820032" y="5285232"/>
             <a:ext cx="675193" cy="182880"/>
           </a:xfrm>
           <a:prstGeom prst="roundRect">
@@ -4960,13 +5785,13 @@
       </p:sp>
       <p:sp>
         <p:nvSpPr>
-          <p:cNvPr id="38" name="Text 35"/>
-          <p:cNvSpPr/>
-          <p:nvPr/>
-        </p:nvSpPr>
-        <p:spPr>
-          <a:xfrm>
-            <a:off x="4550089" y="4727448"/>
+          <p:cNvPr id="49" name="Text 47"/>
+          <p:cNvSpPr/>
+          <p:nvPr/>
+        </p:nvSpPr>
+        <p:spPr>
+          <a:xfrm>
+            <a:off x="4550089" y="5285232"/>
             <a:ext cx="727862" cy="182880"/>
           </a:xfrm>
           <a:prstGeom prst="roundRect">
@@ -5007,13 +5832,13 @@
       </p:sp>
       <p:sp>
         <p:nvSpPr>
-          <p:cNvPr id="39" name="Text 36"/>
-          <p:cNvSpPr/>
-          <p:nvPr/>
-        </p:nvSpPr>
-        <p:spPr>
-          <a:xfrm>
-            <a:off x="5332815" y="4727448"/>
+          <p:cNvPr id="50" name="Text 48"/>
+          <p:cNvSpPr/>
+          <p:nvPr/>
+        </p:nvSpPr>
+        <p:spPr>
+          <a:xfrm>
+            <a:off x="5332815" y="5285232"/>
             <a:ext cx="517185" cy="182880"/>
           </a:xfrm>
           <a:prstGeom prst="roundRect">
@@ -5054,13 +5879,13 @@
       </p:sp>
       <p:sp>
         <p:nvSpPr>
-          <p:cNvPr id="40" name="Text 37"/>
-          <p:cNvSpPr/>
-          <p:nvPr/>
-        </p:nvSpPr>
-        <p:spPr>
-          <a:xfrm>
-            <a:off x="3820032" y="4946904"/>
+          <p:cNvPr id="51" name="Text 49"/>
+          <p:cNvSpPr/>
+          <p:nvPr/>
+        </p:nvSpPr>
+        <p:spPr>
+          <a:xfrm>
+            <a:off x="3820032" y="5504688"/>
             <a:ext cx="1043879" cy="182880"/>
           </a:xfrm>
           <a:prstGeom prst="roundRect">
@@ -5101,13 +5926,13 @@
       </p:sp>
       <p:sp>
         <p:nvSpPr>
-          <p:cNvPr id="41" name="Text 38"/>
-          <p:cNvSpPr/>
-          <p:nvPr/>
-        </p:nvSpPr>
-        <p:spPr>
-          <a:xfrm>
-            <a:off x="4918775" y="4946904"/>
+          <p:cNvPr id="52" name="Text 50"/>
+          <p:cNvSpPr/>
+          <p:nvPr/>
+        </p:nvSpPr>
+        <p:spPr>
+          <a:xfrm>
+            <a:off x="4918775" y="5504688"/>
             <a:ext cx="622524" cy="182880"/>
           </a:xfrm>
           <a:prstGeom prst="roundRect">
@@ -5148,13 +5973,13 @@
       </p:sp>
       <p:sp>
         <p:nvSpPr>
-          <p:cNvPr id="42" name="Text 39"/>
-          <p:cNvSpPr/>
-          <p:nvPr/>
-        </p:nvSpPr>
-        <p:spPr>
-          <a:xfrm>
-            <a:off x="5596163" y="4946904"/>
+          <p:cNvPr id="53" name="Text 51"/>
+          <p:cNvSpPr/>
+          <p:nvPr/>
+        </p:nvSpPr>
+        <p:spPr>
+          <a:xfrm>
+            <a:off x="5596163" y="5504688"/>
             <a:ext cx="411846" cy="182880"/>
           </a:xfrm>
           <a:prstGeom prst="roundRect">
@@ -5195,13 +6020,13 @@
       </p:sp>
       <p:sp>
         <p:nvSpPr>
-          <p:cNvPr id="43" name="Text 40"/>
-          <p:cNvSpPr/>
-          <p:nvPr/>
-        </p:nvSpPr>
-        <p:spPr>
-          <a:xfrm>
-            <a:off x="3820032" y="5166360"/>
+          <p:cNvPr id="54" name="Text 52"/>
+          <p:cNvSpPr/>
+          <p:nvPr/>
+        </p:nvSpPr>
+        <p:spPr>
+          <a:xfrm>
+            <a:off x="3820032" y="5724144"/>
             <a:ext cx="1096548" cy="182880"/>
           </a:xfrm>
           <a:prstGeom prst="roundRect">
@@ -5242,13 +6067,13 @@
       </p:sp>
       <p:sp>
         <p:nvSpPr>
-          <p:cNvPr id="44" name="Text 41"/>
+          <p:cNvPr id="55" name="Text 53"/>
           <p:cNvSpPr/>
           <p:nvPr/>
         </p:nvSpPr>
         <p:spPr>
           <a:xfrm rot="-72000">
-            <a:off x="3792600" y="5477256"/>
+            <a:off x="3792600" y="6993072"/>
             <a:ext cx="3106800" cy="365760"/>
           </a:xfrm>
           <a:prstGeom prst="roundRect">
@@ -5296,7 +6121,7 @@
       </p:sp>
       <p:sp>
         <p:nvSpPr>
-          <p:cNvPr id="45" name="Text 42"/>
+          <p:cNvPr id="56" name="Text 54"/>
           <p:cNvSpPr/>
           <p:nvPr/>
         </p:nvSpPr>
@@ -5335,14 +6160,14 @@
       </p:sp>
       <p:sp>
         <p:nvSpPr>
-          <p:cNvPr id="46" name="Text 43"/>
+          <p:cNvPr id="57" name="Text 55"/>
           <p:cNvSpPr/>
           <p:nvPr/>
         </p:nvSpPr>
         <p:spPr>
           <a:xfrm>
             <a:off x="7384032" y="530352"/>
-            <a:ext cx="3051936" cy="256032"/>
+            <a:ext cx="3051936" cy="274320"/>
           </a:xfrm>
           <a:prstGeom prst="rect">
             <a:avLst/>
@@ -5369,7 +6194,7 @@
                 <a:ea typeface="Cambria" pitchFamily="34" charset="-122"/>
                 <a:cs typeface="Cambria" pitchFamily="34" charset="-120"/>
               </a:rPr>
-              <a:t>Qualquer conteúdo </a:t>
+              <a:t>Qualquer conteúdo</a:t>
             </a:r>
             <a:endParaRPr lang="en-US" sz="1500" dirty="0"/>
           </a:p>
@@ -5377,18 +6202,18 @@
       </p:sp>
       <p:sp>
         <p:nvSpPr>
-          <p:cNvPr id="47" name="Text 44"/>
+          <p:cNvPr id="58" name="Text 56"/>
           <p:cNvSpPr/>
           <p:nvPr/>
         </p:nvSpPr>
         <p:spPr>
           <a:xfrm rot="-180000">
-            <a:off x="7384032" y="804672"/>
-            <a:ext cx="1417320" cy="347472"/>
+            <a:off x="7384032" y="841248"/>
+            <a:ext cx="1371600" cy="329184"/>
           </a:xfrm>
           <a:prstGeom prst="roundRect">
             <a:avLst>
-              <a:gd name="adj" fmla="val 21053"/>
+              <a:gd name="adj" fmla="val 22222"/>
             </a:avLst>
           </a:prstGeom>
           <a:solidFill>
@@ -5415,7 +6240,7 @@
               <a:buNone/>
             </a:pPr>
             <a:r>
-              <a:rPr lang="en-US" sz="1400" b="1" dirty="0">
+              <a:rPr lang="en-US" sz="1300" b="1" dirty="0">
                 <a:solidFill>
                   <a:srgbClr val="180E4E"/>
                 </a:solidFill>
@@ -5425,20 +6250,20 @@
               </a:rPr>
               <a:t>vira jogo.</a:t>
             </a:r>
-            <a:endParaRPr lang="en-US" sz="1400" dirty="0"/>
-          </a:p>
-        </p:txBody>
-      </p:sp>
-      <p:sp>
-        <p:nvSpPr>
-          <p:cNvPr id="48" name="Text 45"/>
-          <p:cNvSpPr/>
-          <p:nvPr/>
-        </p:nvSpPr>
-        <p:spPr>
-          <a:xfrm>
-            <a:off x="7384032" y="1261872"/>
-            <a:ext cx="3051936" cy="457200"/>
+            <a:endParaRPr lang="en-US" sz="1300" dirty="0"/>
+          </a:p>
+        </p:txBody>
+      </p:sp>
+      <p:sp>
+        <p:nvSpPr>
+          <p:cNvPr id="59" name="Text 57"/>
+          <p:cNvSpPr/>
+          <p:nvPr/>
+        </p:nvSpPr>
+        <p:spPr>
+          <a:xfrm>
+            <a:off x="7384032" y="1353312"/>
+            <a:ext cx="3051936" cy="640080"/>
           </a:xfrm>
           <a:prstGeom prst="rect">
             <a:avLst/>
@@ -5465,7 +6290,7 @@
                 <a:ea typeface="Calibri" pitchFamily="34" charset="-122"/>
                 <a:cs typeface="Calibri" pitchFamily="34" charset="-120"/>
               </a:rPr>
-              <a:t>A IA escreve as perguntas pela disciplina e pelo nível da turma. Quem monta a grade é o app: o jogo sempre sai jogável.</a:t>
+              <a:t>Você dá o tema, ele escreve as perguntas pelo nível da sua turma e monta o jogo inteiro. Uns saem no papel, para imprimir e distribuir. Outros rodam na TV da sala, com a turma dividida em equipes.</a:t>
             </a:r>
             <a:endParaRPr lang="en-US" sz="900" dirty="0"/>
           </a:p>
@@ -5473,428 +6298,14 @@
       </p:sp>
       <p:sp>
         <p:nvSpPr>
-          <p:cNvPr id="49" name="Shape 46"/>
-          <p:cNvSpPr/>
-          <p:nvPr/>
-        </p:nvSpPr>
-        <p:spPr>
-          <a:xfrm>
-            <a:off x="7384032" y="1773936"/>
-            <a:ext cx="3051936" cy="1527048"/>
-          </a:xfrm>
-          <a:prstGeom prst="roundRect">
-            <a:avLst>
-              <a:gd name="adj" fmla="val 2994"/>
-            </a:avLst>
-          </a:prstGeom>
-          <a:solidFill>
-            <a:srgbClr val="FFFFFF"/>
-          </a:solidFill>
-          <a:ln w="25400">
-            <a:solidFill>
-              <a:srgbClr val="180E4E"/>
-            </a:solidFill>
-            <a:prstDash val="solid"/>
-          </a:ln>
-          <a:effectLst>
-            <a:outerShdw sx="100000" sy="100000" kx="0" ky="0" algn="bl" rotWithShape="0" blurRad="101600" dist="63500" dir="2700000">
-              <a:srgbClr val="180E4E">
-                <a:alpha val="25000"/>
-              </a:srgbClr>
-            </a:outerShdw>
-          </a:effectLst>
-        </p:spPr>
-      </p:sp>
-      <p:pic>
-        <p:nvPicPr>
-          <p:cNvPr id="50" name="Image 1" descr="/home/user/Site/folder/pptx/assets/illu-mundo-perdido.jpg">    </p:cNvPr>
-          <p:cNvPicPr>
-            <a:picLocks noChangeAspect="1"/>
-          </p:cNvPicPr>
-          <p:nvPr/>
-        </p:nvPicPr>
-        <p:blipFill>
-          <a:blip r:embed="rId2"/>
-          <a:srcRect l="0" r="0" t="0" b="0"/>
-          <a:stretch/>
-        </p:blipFill>
-        <p:spPr>
-          <a:xfrm>
-            <a:off x="7384032" y="1773936"/>
-            <a:ext cx="3051936" cy="960120"/>
-          </a:xfrm>
-          <a:prstGeom prst="rect">
-            <a:avLst/>
-          </a:prstGeom>
-        </p:spPr>
-      </p:pic>
-      <p:sp>
-        <p:nvSpPr>
-          <p:cNvPr id="51" name="Text 47"/>
-          <p:cNvSpPr/>
-          <p:nvPr/>
-        </p:nvSpPr>
-        <p:spPr>
-          <a:xfrm>
-            <a:off x="7475472" y="2779776"/>
-            <a:ext cx="2869056" cy="182880"/>
-          </a:xfrm>
-          <a:prstGeom prst="rect">
-            <a:avLst/>
-          </a:prstGeom>
-          <a:noFill/>
-          <a:ln/>
-        </p:spPr>
-        <p:txBody>
-          <a:bodyPr wrap="square" lIns="0" tIns="0" rIns="0" bIns="0" rtlCol="0" anchor="ctr"/>
-          <a:lstStyle/>
-          <a:p>
-            <a:pPr indent="0" marL="0">
-              <a:buNone/>
-            </a:pPr>
-            <a:r>
-              <a:rPr lang="en-US" sz="1050" b="1" dirty="0">
-                <a:solidFill>
-                  <a:srgbClr val="180E4E"/>
-                </a:solidFill>
-                <a:latin typeface="Cambria" pitchFamily="34" charset="0"/>
-                <a:ea typeface="Cambria" pitchFamily="34" charset="-122"/>
-                <a:cs typeface="Cambria" pitchFamily="34" charset="-120"/>
-              </a:rPr>
-              <a:t>Mundo Perdido</a:t>
-            </a:r>
-            <a:endParaRPr lang="en-US" sz="1050" dirty="0"/>
-          </a:p>
-        </p:txBody>
-      </p:sp>
-      <p:sp>
-        <p:nvSpPr>
-          <p:cNvPr id="52" name="Text 48"/>
-          <p:cNvSpPr/>
-          <p:nvPr/>
-        </p:nvSpPr>
-        <p:spPr>
-          <a:xfrm>
-            <a:off x="7475472" y="2953512"/>
-            <a:ext cx="2869056" cy="310896"/>
-          </a:xfrm>
-          <a:prstGeom prst="rect">
-            <a:avLst/>
-          </a:prstGeom>
-          <a:noFill/>
-          <a:ln/>
-        </p:spPr>
-        <p:txBody>
-          <a:bodyPr wrap="square" lIns="0" tIns="0" rIns="0" bIns="0" rtlCol="0" anchor="t"/>
-          <a:lstStyle/>
-          <a:p>
-            <a:pPr indent="0" marL="0">
-              <a:lnSpc>
-                <a:spcPts val="900"/>
-              </a:lnSpc>
-              <a:buNone/>
-            </a:pPr>
-            <a:r>
-              <a:rPr lang="en-US" sz="750" dirty="0">
-                <a:solidFill>
-                  <a:srgbClr val="5B6070"/>
-                </a:solidFill>
-                <a:latin typeface="Calibri" pitchFamily="34" charset="0"/>
-                <a:ea typeface="Calibri" pitchFamily="34" charset="-122"/>
-                <a:cs typeface="Calibri" pitchFamily="34" charset="-120"/>
-              </a:rPr>
-              <a:t>Aventura narrativa em tela cheia. O aluno joga sozinho, no próprio ritmo.</a:t>
-            </a:r>
-            <a:endParaRPr lang="en-US" sz="750" dirty="0"/>
-          </a:p>
-        </p:txBody>
-      </p:sp>
-      <p:sp>
-        <p:nvSpPr>
-          <p:cNvPr id="53" name="Shape 49"/>
-          <p:cNvSpPr/>
-          <p:nvPr/>
-        </p:nvSpPr>
-        <p:spPr>
-          <a:xfrm>
-            <a:off x="7384032" y="3374136"/>
-            <a:ext cx="3051936" cy="1527048"/>
-          </a:xfrm>
-          <a:prstGeom prst="roundRect">
-            <a:avLst>
-              <a:gd name="adj" fmla="val 2994"/>
-            </a:avLst>
-          </a:prstGeom>
-          <a:solidFill>
-            <a:srgbClr val="FFFFFF"/>
-          </a:solidFill>
-          <a:ln w="25400">
-            <a:solidFill>
-              <a:srgbClr val="180E4E"/>
-            </a:solidFill>
-            <a:prstDash val="solid"/>
-          </a:ln>
-          <a:effectLst>
-            <a:outerShdw sx="100000" sy="100000" kx="0" ky="0" algn="bl" rotWithShape="0" blurRad="101600" dist="63500" dir="2700000">
-              <a:srgbClr val="180E4E">
-                <a:alpha val="25000"/>
-              </a:srgbClr>
-            </a:outerShdw>
-          </a:effectLst>
-        </p:spPr>
-      </p:sp>
-      <p:pic>
-        <p:nvPicPr>
-          <p:cNvPr id="54" name="Image 2" descr="/home/user/Site/folder/pptx/assets/illu-quiz-relampago.jpg">    </p:cNvPr>
-          <p:cNvPicPr>
-            <a:picLocks noChangeAspect="1"/>
-          </p:cNvPicPr>
-          <p:nvPr/>
-        </p:nvPicPr>
-        <p:blipFill>
-          <a:blip r:embed="rId3"/>
-          <a:srcRect l="0" r="0" t="0" b="0"/>
-          <a:stretch/>
-        </p:blipFill>
-        <p:spPr>
-          <a:xfrm>
-            <a:off x="7384032" y="3374136"/>
-            <a:ext cx="3051936" cy="960120"/>
-          </a:xfrm>
-          <a:prstGeom prst="rect">
-            <a:avLst/>
-          </a:prstGeom>
-        </p:spPr>
-      </p:pic>
-      <p:sp>
-        <p:nvSpPr>
-          <p:cNvPr id="55" name="Text 50"/>
-          <p:cNvSpPr/>
-          <p:nvPr/>
-        </p:nvSpPr>
-        <p:spPr>
-          <a:xfrm>
-            <a:off x="7475472" y="4379976"/>
-            <a:ext cx="2869056" cy="182880"/>
-          </a:xfrm>
-          <a:prstGeom prst="rect">
-            <a:avLst/>
-          </a:prstGeom>
-          <a:noFill/>
-          <a:ln/>
-        </p:spPr>
-        <p:txBody>
-          <a:bodyPr wrap="square" lIns="0" tIns="0" rIns="0" bIns="0" rtlCol="0" anchor="ctr"/>
-          <a:lstStyle/>
-          <a:p>
-            <a:pPr indent="0" marL="0">
-              <a:buNone/>
-            </a:pPr>
-            <a:r>
-              <a:rPr lang="en-US" sz="1050" b="1" dirty="0">
-                <a:solidFill>
-                  <a:srgbClr val="180E4E"/>
-                </a:solidFill>
-                <a:latin typeface="Cambria" pitchFamily="34" charset="0"/>
-                <a:ea typeface="Cambria" pitchFamily="34" charset="-122"/>
-                <a:cs typeface="Cambria" pitchFamily="34" charset="-120"/>
-              </a:rPr>
-              <a:t>Quiz Relâmpago</a:t>
-            </a:r>
-            <a:endParaRPr lang="en-US" sz="1050" dirty="0"/>
-          </a:p>
-        </p:txBody>
-      </p:sp>
-      <p:sp>
-        <p:nvSpPr>
-          <p:cNvPr id="56" name="Text 51"/>
-          <p:cNvSpPr/>
-          <p:nvPr/>
-        </p:nvSpPr>
-        <p:spPr>
-          <a:xfrm>
-            <a:off x="7475472" y="4553712"/>
-            <a:ext cx="2869056" cy="310896"/>
-          </a:xfrm>
-          <a:prstGeom prst="rect">
-            <a:avLst/>
-          </a:prstGeom>
-          <a:noFill/>
-          <a:ln/>
-        </p:spPr>
-        <p:txBody>
-          <a:bodyPr wrap="square" lIns="0" tIns="0" rIns="0" bIns="0" rtlCol="0" anchor="t"/>
-          <a:lstStyle/>
-          <a:p>
-            <a:pPr indent="0" marL="0">
-              <a:lnSpc>
-                <a:spcPts val="900"/>
-              </a:lnSpc>
-              <a:buNone/>
-            </a:pPr>
-            <a:r>
-              <a:rPr lang="en-US" sz="750" dirty="0">
-                <a:solidFill>
-                  <a:srgbClr val="5B6070"/>
-                </a:solidFill>
-                <a:latin typeface="Calibri" pitchFamily="34" charset="0"/>
-                <a:ea typeface="Calibri" pitchFamily="34" charset="-122"/>
-                <a:cs typeface="Calibri" pitchFamily="34" charset="-120"/>
-              </a:rPr>
-              <a:t>Dez rodadas no projetor. Fecha a aula em cinco minutos.</a:t>
-            </a:r>
-            <a:endParaRPr lang="en-US" sz="750" dirty="0"/>
-          </a:p>
-        </p:txBody>
-      </p:sp>
-      <p:sp>
-        <p:nvSpPr>
-          <p:cNvPr id="57" name="Shape 52"/>
-          <p:cNvSpPr/>
-          <p:nvPr/>
-        </p:nvSpPr>
-        <p:spPr>
-          <a:xfrm>
-            <a:off x="7384032" y="4974336"/>
-            <a:ext cx="3051936" cy="1527048"/>
-          </a:xfrm>
-          <a:prstGeom prst="roundRect">
-            <a:avLst>
-              <a:gd name="adj" fmla="val 2994"/>
-            </a:avLst>
-          </a:prstGeom>
-          <a:solidFill>
-            <a:srgbClr val="FFFFFF"/>
-          </a:solidFill>
-          <a:ln w="25400">
-            <a:solidFill>
-              <a:srgbClr val="180E4E"/>
-            </a:solidFill>
-            <a:prstDash val="solid"/>
-          </a:ln>
-          <a:effectLst>
-            <a:outerShdw sx="100000" sy="100000" kx="0" ky="0" algn="bl" rotWithShape="0" blurRad="101600" dist="63500" dir="2700000">
-              <a:srgbClr val="180E4E">
-                <a:alpha val="25000"/>
-              </a:srgbClr>
-            </a:outerShdw>
-          </a:effectLst>
-        </p:spPr>
-      </p:sp>
-      <p:pic>
-        <p:nvPicPr>
-          <p:cNvPr id="58" name="Image 3" descr="/home/user/Site/folder/pptx/assets/illu-batalha.jpg">    </p:cNvPr>
-          <p:cNvPicPr>
-            <a:picLocks noChangeAspect="1"/>
-          </p:cNvPicPr>
-          <p:nvPr/>
-        </p:nvPicPr>
-        <p:blipFill>
-          <a:blip r:embed="rId4"/>
-          <a:srcRect l="0" r="0" t="0" b="0"/>
-          <a:stretch/>
-        </p:blipFill>
-        <p:spPr>
-          <a:xfrm>
-            <a:off x="7384032" y="4974336"/>
-            <a:ext cx="3051936" cy="960120"/>
-          </a:xfrm>
-          <a:prstGeom prst="rect">
-            <a:avLst/>
-          </a:prstGeom>
-        </p:spPr>
-      </p:pic>
-      <p:sp>
-        <p:nvSpPr>
-          <p:cNvPr id="59" name="Text 53"/>
-          <p:cNvSpPr/>
-          <p:nvPr/>
-        </p:nvSpPr>
-        <p:spPr>
-          <a:xfrm>
-            <a:off x="7475472" y="5980176"/>
-            <a:ext cx="2869056" cy="182880"/>
-          </a:xfrm>
-          <a:prstGeom prst="rect">
-            <a:avLst/>
-          </a:prstGeom>
-          <a:noFill/>
-          <a:ln/>
-        </p:spPr>
-        <p:txBody>
-          <a:bodyPr wrap="square" lIns="0" tIns="0" rIns="0" bIns="0" rtlCol="0" anchor="ctr"/>
-          <a:lstStyle/>
-          <a:p>
-            <a:pPr indent="0" marL="0">
-              <a:buNone/>
-            </a:pPr>
-            <a:r>
-              <a:rPr lang="en-US" sz="1050" b="1" dirty="0">
-                <a:solidFill>
-                  <a:srgbClr val="180E4E"/>
-                </a:solidFill>
-                <a:latin typeface="Cambria" pitchFamily="34" charset="0"/>
-                <a:ea typeface="Cambria" pitchFamily="34" charset="-122"/>
-                <a:cs typeface="Cambria" pitchFamily="34" charset="-120"/>
-              </a:rPr>
-              <a:t>QuaqueMagia</a:t>
-            </a:r>
-            <a:endParaRPr lang="en-US" sz="1050" dirty="0"/>
-          </a:p>
-        </p:txBody>
-      </p:sp>
-      <p:sp>
-        <p:nvSpPr>
-          <p:cNvPr id="60" name="Text 54"/>
-          <p:cNvSpPr/>
-          <p:nvPr/>
-        </p:nvSpPr>
-        <p:spPr>
-          <a:xfrm>
-            <a:off x="7475472" y="6153912"/>
-            <a:ext cx="2869056" cy="310896"/>
-          </a:xfrm>
-          <a:prstGeom prst="rect">
-            <a:avLst/>
-          </a:prstGeom>
-          <a:noFill/>
-          <a:ln/>
-        </p:spPr>
-        <p:txBody>
-          <a:bodyPr wrap="square" lIns="0" tIns="0" rIns="0" bIns="0" rtlCol="0" anchor="t"/>
-          <a:lstStyle/>
-          <a:p>
-            <a:pPr indent="0" marL="0">
-              <a:lnSpc>
-                <a:spcPts val="900"/>
-              </a:lnSpc>
-              <a:buNone/>
-            </a:pPr>
-            <a:r>
-              <a:rPr lang="en-US" sz="750" dirty="0">
-                <a:solidFill>
-                  <a:srgbClr val="5B6070"/>
-                </a:solidFill>
-                <a:latin typeface="Calibri" pitchFamily="34" charset="0"/>
-                <a:ea typeface="Calibri" pitchFamily="34" charset="-122"/>
-                <a:cs typeface="Calibri" pitchFamily="34" charset="-120"/>
-              </a:rPr>
-              <a:t>Combate por acertos entre as equipes da turma.</a:t>
-            </a:r>
-            <a:endParaRPr lang="en-US" sz="750" dirty="0"/>
-          </a:p>
-        </p:txBody>
-      </p:sp>
-      <p:sp>
-        <p:nvSpPr>
-          <p:cNvPr id="61" name="Text 55"/>
-          <p:cNvSpPr/>
-          <p:nvPr/>
-        </p:nvSpPr>
-        <p:spPr>
-          <a:xfrm>
-            <a:off x="7384032" y="6620256"/>
-            <a:ext cx="1675912" cy="182880"/>
+          <p:cNvPr id="60" name="Text 58"/>
+          <p:cNvSpPr/>
+          <p:nvPr/>
+        </p:nvSpPr>
+        <p:spPr>
+          <a:xfrm>
+            <a:off x="7384032" y="2048256"/>
+            <a:ext cx="780532" cy="182880"/>
           </a:xfrm>
           <a:prstGeom prst="roundRect">
             <a:avLst>
@@ -5926,7 +6337,7 @@
                 <a:ea typeface="Calibri" pitchFamily="34" charset="-122"/>
                 <a:cs typeface="Calibri" pitchFamily="34" charset="-120"/>
               </a:rPr>
-              <a:t>Escape Room · 4 ambientações</a:t>
+              <a:t>Escape Room</a:t>
             </a:r>
             <a:endParaRPr lang="en-US" sz="800" dirty="0"/>
           </a:p>
@@ -5934,13 +6345,13 @@
       </p:sp>
       <p:sp>
         <p:nvSpPr>
-          <p:cNvPr id="62" name="Text 56"/>
-          <p:cNvSpPr/>
-          <p:nvPr/>
-        </p:nvSpPr>
-        <p:spPr>
-          <a:xfrm>
-            <a:off x="9114808" y="6620256"/>
+          <p:cNvPr id="61" name="Text 59"/>
+          <p:cNvSpPr/>
+          <p:nvPr/>
+        </p:nvSpPr>
+        <p:spPr>
+          <a:xfrm>
+            <a:off x="8219428" y="2048256"/>
             <a:ext cx="885871" cy="182880"/>
           </a:xfrm>
           <a:prstGeom prst="roundRect">
@@ -5981,13 +6392,13 @@
       </p:sp>
       <p:sp>
         <p:nvSpPr>
-          <p:cNvPr id="63" name="Text 57"/>
-          <p:cNvSpPr/>
-          <p:nvPr/>
-        </p:nvSpPr>
-        <p:spPr>
-          <a:xfrm>
-            <a:off x="7384032" y="6839712"/>
+          <p:cNvPr id="62" name="Text 60"/>
+          <p:cNvSpPr/>
+          <p:nvPr/>
+        </p:nvSpPr>
+        <p:spPr>
+          <a:xfrm>
+            <a:off x="9160163" y="2048256"/>
             <a:ext cx="622524" cy="182880"/>
           </a:xfrm>
           <a:prstGeom prst="roundRect">
@@ -6028,13 +6439,13 @@
       </p:sp>
       <p:sp>
         <p:nvSpPr>
-          <p:cNvPr id="64" name="Text 58"/>
-          <p:cNvSpPr/>
-          <p:nvPr/>
-        </p:nvSpPr>
-        <p:spPr>
-          <a:xfrm>
-            <a:off x="8061420" y="6839712"/>
+          <p:cNvPr id="63" name="Text 61"/>
+          <p:cNvSpPr/>
+          <p:nvPr/>
+        </p:nvSpPr>
+        <p:spPr>
+          <a:xfrm>
+            <a:off x="9837550" y="2048256"/>
             <a:ext cx="464515" cy="182880"/>
           </a:xfrm>
           <a:prstGeom prst="roundRect">
@@ -6075,13 +6486,13 @@
       </p:sp>
       <p:sp>
         <p:nvSpPr>
-          <p:cNvPr id="65" name="Text 59"/>
-          <p:cNvSpPr/>
-          <p:nvPr/>
-        </p:nvSpPr>
-        <p:spPr>
-          <a:xfrm>
-            <a:off x="8580799" y="6839712"/>
+          <p:cNvPr id="64" name="Text 62"/>
+          <p:cNvSpPr/>
+          <p:nvPr/>
+        </p:nvSpPr>
+        <p:spPr>
+          <a:xfrm>
+            <a:off x="7384032" y="2267712"/>
             <a:ext cx="569854" cy="182880"/>
           </a:xfrm>
           <a:prstGeom prst="roundRect">
@@ -6122,13 +6533,13 @@
       </p:sp>
       <p:sp>
         <p:nvSpPr>
-          <p:cNvPr id="66" name="Text 60"/>
-          <p:cNvSpPr/>
-          <p:nvPr/>
-        </p:nvSpPr>
-        <p:spPr>
-          <a:xfrm>
-            <a:off x="9205517" y="6839712"/>
+          <p:cNvPr id="65" name="Text 63"/>
+          <p:cNvSpPr/>
+          <p:nvPr/>
+        </p:nvSpPr>
+        <p:spPr>
+          <a:xfrm>
+            <a:off x="8008750" y="2267712"/>
             <a:ext cx="727862" cy="182880"/>
           </a:xfrm>
           <a:prstGeom prst="roundRect">
@@ -6169,14 +6580,680 @@
       </p:sp>
       <p:sp>
         <p:nvSpPr>
-          <p:cNvPr id="67" name="Text 61"/>
+          <p:cNvPr id="66" name="Text 64"/>
+          <p:cNvSpPr/>
+          <p:nvPr/>
+        </p:nvSpPr>
+        <p:spPr>
+          <a:xfrm>
+            <a:off x="8791476" y="2267712"/>
+            <a:ext cx="727862" cy="182880"/>
+          </a:xfrm>
+          <a:prstGeom prst="roundRect">
+            <a:avLst>
+              <a:gd name="adj" fmla="val 250000"/>
+            </a:avLst>
+          </a:prstGeom>
+          <a:solidFill>
+            <a:srgbClr val="FFFFFF"/>
+          </a:solidFill>
+          <a:ln w="12700">
+            <a:solidFill>
+              <a:srgbClr val="DCDFF2"/>
+            </a:solidFill>
+          </a:ln>
+        </p:spPr>
+        <p:txBody>
+          <a:bodyPr wrap="square" lIns="254" tIns="254" rIns="254" bIns="254" rtlCol="0" anchor="ctr"/>
+          <a:lstStyle/>
+          <a:p>
+            <a:pPr algn="ctr" indent="0" marL="0">
+              <a:buNone/>
+            </a:pPr>
+            <a:r>
+              <a:rPr lang="en-US" sz="800" b="1" dirty="0">
+                <a:solidFill>
+                  <a:srgbClr val="180E4E"/>
+                </a:solidFill>
+                <a:latin typeface="Calibri" pitchFamily="34" charset="0"/>
+                <a:ea typeface="Calibri" pitchFamily="34" charset="-122"/>
+                <a:cs typeface="Calibri" pitchFamily="34" charset="-120"/>
+              </a:rPr>
+              <a:t>Quiz na TV</a:t>
+            </a:r>
+            <a:endParaRPr lang="en-US" sz="800" dirty="0"/>
+          </a:p>
+        </p:txBody>
+      </p:sp>
+      <p:sp>
+        <p:nvSpPr>
+          <p:cNvPr id="67" name="Text 65"/>
+          <p:cNvSpPr/>
+          <p:nvPr/>
+        </p:nvSpPr>
+        <p:spPr>
+          <a:xfrm>
+            <a:off x="7384032" y="2487168"/>
+            <a:ext cx="1149218" cy="182880"/>
+          </a:xfrm>
+          <a:prstGeom prst="roundRect">
+            <a:avLst>
+              <a:gd name="adj" fmla="val 250000"/>
+            </a:avLst>
+          </a:prstGeom>
+          <a:solidFill>
+            <a:srgbClr val="FFFFFF"/>
+          </a:solidFill>
+          <a:ln w="12700">
+            <a:solidFill>
+              <a:srgbClr val="DCDFF2"/>
+            </a:solidFill>
+          </a:ln>
+        </p:spPr>
+        <p:txBody>
+          <a:bodyPr wrap="square" lIns="254" tIns="254" rIns="254" bIns="254" rtlCol="0" anchor="ctr"/>
+          <a:lstStyle/>
+          <a:p>
+            <a:pPr algn="ctr" indent="0" marL="0">
+              <a:buNone/>
+            </a:pPr>
+            <a:r>
+              <a:rPr lang="en-US" sz="800" b="1" dirty="0">
+                <a:solidFill>
+                  <a:srgbClr val="180E4E"/>
+                </a:solidFill>
+                <a:latin typeface="Calibri" pitchFamily="34" charset="0"/>
+                <a:ea typeface="Calibri" pitchFamily="34" charset="-122"/>
+                <a:cs typeface="Calibri" pitchFamily="34" charset="-120"/>
+              </a:rPr>
+              <a:t>Batalha em equipes</a:t>
+            </a:r>
+            <a:endParaRPr lang="en-US" sz="800" dirty="0"/>
+          </a:p>
+        </p:txBody>
+      </p:sp>
+      <p:sp>
+        <p:nvSpPr>
+          <p:cNvPr id="68" name="Text 66"/>
+          <p:cNvSpPr/>
+          <p:nvPr/>
+        </p:nvSpPr>
+        <p:spPr>
+          <a:xfrm>
+            <a:off x="8588114" y="2487168"/>
+            <a:ext cx="1623243" cy="182880"/>
+          </a:xfrm>
+          <a:prstGeom prst="roundRect">
+            <a:avLst>
+              <a:gd name="adj" fmla="val 250000"/>
+            </a:avLst>
+          </a:prstGeom>
+          <a:solidFill>
+            <a:srgbClr val="FFFFFF"/>
+          </a:solidFill>
+          <a:ln w="12700">
+            <a:solidFill>
+              <a:srgbClr val="DCDFF2"/>
+            </a:solidFill>
+          </a:ln>
+        </p:spPr>
+        <p:txBody>
+          <a:bodyPr wrap="square" lIns="254" tIns="254" rIns="254" bIns="254" rtlCol="0" anchor="ctr"/>
+          <a:lstStyle/>
+          <a:p>
+            <a:pPr algn="ctr" indent="0" marL="0">
+              <a:buNone/>
+            </a:pPr>
+            <a:r>
+              <a:rPr lang="en-US" sz="800" b="1" dirty="0">
+                <a:solidFill>
+                  <a:srgbClr val="180E4E"/>
+                </a:solidFill>
+                <a:latin typeface="Calibri" pitchFamily="34" charset="0"/>
+                <a:ea typeface="Calibri" pitchFamily="34" charset="-122"/>
+                <a:cs typeface="Calibri" pitchFamily="34" charset="-120"/>
+              </a:rPr>
+              <a:t>Aventura para jogar sozinho</a:t>
+            </a:r>
+            <a:endParaRPr lang="en-US" sz="800" dirty="0"/>
+          </a:p>
+        </p:txBody>
+      </p:sp>
+      <p:sp>
+        <p:nvSpPr>
+          <p:cNvPr id="69" name="Text 67"/>
+          <p:cNvSpPr/>
+          <p:nvPr/>
+        </p:nvSpPr>
+        <p:spPr>
+          <a:xfrm>
+            <a:off x="7384032" y="2926080"/>
+            <a:ext cx="3051936" cy="201168"/>
+          </a:xfrm>
+          <a:prstGeom prst="rect">
+            <a:avLst/>
+          </a:prstGeom>
+          <a:noFill/>
+          <a:ln/>
+        </p:spPr>
+        <p:txBody>
+          <a:bodyPr wrap="square" lIns="0" tIns="0" rIns="0" bIns="0" rtlCol="0" anchor="ctr"/>
+          <a:lstStyle/>
+          <a:p>
+            <a:pPr indent="0" marL="0">
+              <a:buNone/>
+            </a:pPr>
+            <a:r>
+              <a:rPr lang="en-US" sz="900" b="1" spc="150" kern="0" dirty="0">
+                <a:solidFill>
+                  <a:srgbClr val="4659FF"/>
+                </a:solidFill>
+                <a:latin typeface="Calibri" pitchFamily="34" charset="0"/>
+                <a:ea typeface="Calibri" pitchFamily="34" charset="-122"/>
+                <a:cs typeface="Calibri" pitchFamily="34" charset="-120"/>
+              </a:rPr>
+              <a:t>PERGUNTAS QUE TODO PROFESSOR FAZ</a:t>
+            </a:r>
+            <a:endParaRPr lang="en-US" sz="900" dirty="0"/>
+          </a:p>
+        </p:txBody>
+      </p:sp>
+      <p:sp>
+        <p:nvSpPr>
+          <p:cNvPr id="70" name="Text 68"/>
+          <p:cNvSpPr/>
+          <p:nvPr/>
+        </p:nvSpPr>
+        <p:spPr>
+          <a:xfrm>
+            <a:off x="7384032" y="3200400"/>
+            <a:ext cx="3051936" cy="164592"/>
+          </a:xfrm>
+          <a:prstGeom prst="rect">
+            <a:avLst/>
+          </a:prstGeom>
+          <a:noFill/>
+          <a:ln/>
+        </p:spPr>
+        <p:txBody>
+          <a:bodyPr wrap="square" lIns="0" tIns="0" rIns="0" bIns="0" rtlCol="0" anchor="ctr"/>
+          <a:lstStyle/>
+          <a:p>
+            <a:pPr indent="0" marL="0">
+              <a:buNone/>
+            </a:pPr>
+            <a:r>
+              <a:rPr lang="en-US" sz="1000" b="1" dirty="0">
+                <a:solidFill>
+                  <a:srgbClr val="180E4E"/>
+                </a:solidFill>
+                <a:latin typeface="Cambria" pitchFamily="34" charset="0"/>
+                <a:ea typeface="Cambria" pitchFamily="34" charset="-122"/>
+                <a:cs typeface="Cambria" pitchFamily="34" charset="-120"/>
+              </a:rPr>
+              <a:t>Preciso saber mexer com tecnologia?</a:t>
+            </a:r>
+            <a:endParaRPr lang="en-US" sz="1000" dirty="0"/>
+          </a:p>
+        </p:txBody>
+      </p:sp>
+      <p:sp>
+        <p:nvSpPr>
+          <p:cNvPr id="71" name="Text 69"/>
+          <p:cNvSpPr/>
+          <p:nvPr/>
+        </p:nvSpPr>
+        <p:spPr>
+          <a:xfrm>
+            <a:off x="7384032" y="3374136"/>
+            <a:ext cx="3051936" cy="402336"/>
+          </a:xfrm>
+          <a:prstGeom prst="rect">
+            <a:avLst/>
+          </a:prstGeom>
+          <a:noFill/>
+          <a:ln/>
+        </p:spPr>
+        <p:txBody>
+          <a:bodyPr wrap="square" lIns="0" tIns="0" rIns="0" bIns="0" rtlCol="0" anchor="t"/>
+          <a:lstStyle/>
+          <a:p>
+            <a:pPr indent="0" marL="0">
+              <a:lnSpc>
+                <a:spcPts val="1050"/>
+              </a:lnSpc>
+              <a:buNone/>
+            </a:pPr>
+            <a:r>
+              <a:rPr lang="en-US" sz="850" dirty="0">
+                <a:solidFill>
+                  <a:srgbClr val="5B6070"/>
+                </a:solidFill>
+                <a:latin typeface="Calibri" pitchFamily="34" charset="0"/>
+                <a:ea typeface="Calibri" pitchFamily="34" charset="-122"/>
+                <a:cs typeface="Calibri" pitchFamily="34" charset="-120"/>
+              </a:rPr>
+              <a:t>Não. Você escreve o tema como escreve uma mensagem. Não tem configuração, não tem palavra difícil, não tem curso para fazer antes.</a:t>
+            </a:r>
+            <a:endParaRPr lang="en-US" sz="850" dirty="0"/>
+          </a:p>
+        </p:txBody>
+      </p:sp>
+      <p:sp>
+        <p:nvSpPr>
+          <p:cNvPr id="72" name="Text 70"/>
+          <p:cNvSpPr/>
+          <p:nvPr/>
+        </p:nvSpPr>
+        <p:spPr>
+          <a:xfrm>
+            <a:off x="7384032" y="3849624"/>
+            <a:ext cx="3051936" cy="164592"/>
+          </a:xfrm>
+          <a:prstGeom prst="rect">
+            <a:avLst/>
+          </a:prstGeom>
+          <a:noFill/>
+          <a:ln/>
+        </p:spPr>
+        <p:txBody>
+          <a:bodyPr wrap="square" lIns="0" tIns="0" rIns="0" bIns="0" rtlCol="0" anchor="ctr"/>
+          <a:lstStyle/>
+          <a:p>
+            <a:pPr indent="0" marL="0">
+              <a:buNone/>
+            </a:pPr>
+            <a:r>
+              <a:rPr lang="en-US" sz="1000" b="1" dirty="0">
+                <a:solidFill>
+                  <a:srgbClr val="180E4E"/>
+                </a:solidFill>
+                <a:latin typeface="Cambria" pitchFamily="34" charset="0"/>
+                <a:ea typeface="Cambria" pitchFamily="34" charset="-122"/>
+                <a:cs typeface="Cambria" pitchFamily="34" charset="-120"/>
+              </a:rPr>
+              <a:t>Funciona no meu celular?</a:t>
+            </a:r>
+            <a:endParaRPr lang="en-US" sz="1000" dirty="0"/>
+          </a:p>
+        </p:txBody>
+      </p:sp>
+      <p:sp>
+        <p:nvSpPr>
+          <p:cNvPr id="73" name="Text 71"/>
+          <p:cNvSpPr/>
+          <p:nvPr/>
+        </p:nvSpPr>
+        <p:spPr>
+          <a:xfrm>
+            <a:off x="7384032" y="4023360"/>
+            <a:ext cx="3051936" cy="310896"/>
+          </a:xfrm>
+          <a:prstGeom prst="rect">
+            <a:avLst/>
+          </a:prstGeom>
+          <a:noFill/>
+          <a:ln/>
+        </p:spPr>
+        <p:txBody>
+          <a:bodyPr wrap="square" lIns="0" tIns="0" rIns="0" bIns="0" rtlCol="0" anchor="t"/>
+          <a:lstStyle/>
+          <a:p>
+            <a:pPr indent="0" marL="0">
+              <a:lnSpc>
+                <a:spcPts val="1050"/>
+              </a:lnSpc>
+              <a:buNone/>
+            </a:pPr>
+            <a:r>
+              <a:rPr lang="en-US" sz="850" dirty="0">
+                <a:solidFill>
+                  <a:srgbClr val="5B6070"/>
+                </a:solidFill>
+                <a:latin typeface="Calibri" pitchFamily="34" charset="0"/>
+                <a:ea typeface="Calibri" pitchFamily="34" charset="-122"/>
+                <a:cs typeface="Calibri" pitchFamily="34" charset="-120"/>
+              </a:rPr>
+              <a:t>Funciona. Abre no navegador do celular, do tablet ou do computador, e não precisa instalar nada.</a:t>
+            </a:r>
+            <a:endParaRPr lang="en-US" sz="850" dirty="0"/>
+          </a:p>
+        </p:txBody>
+      </p:sp>
+      <p:sp>
+        <p:nvSpPr>
+          <p:cNvPr id="74" name="Text 72"/>
+          <p:cNvSpPr/>
+          <p:nvPr/>
+        </p:nvSpPr>
+        <p:spPr>
+          <a:xfrm>
+            <a:off x="7384032" y="4407408"/>
+            <a:ext cx="3051936" cy="164592"/>
+          </a:xfrm>
+          <a:prstGeom prst="rect">
+            <a:avLst/>
+          </a:prstGeom>
+          <a:noFill/>
+          <a:ln/>
+        </p:spPr>
+        <p:txBody>
+          <a:bodyPr wrap="square" lIns="0" tIns="0" rIns="0" bIns="0" rtlCol="0" anchor="ctr"/>
+          <a:lstStyle/>
+          <a:p>
+            <a:pPr indent="0" marL="0">
+              <a:buNone/>
+            </a:pPr>
+            <a:r>
+              <a:rPr lang="en-US" sz="1000" b="1" dirty="0">
+                <a:solidFill>
+                  <a:srgbClr val="180E4E"/>
+                </a:solidFill>
+                <a:latin typeface="Cambria" pitchFamily="34" charset="0"/>
+                <a:ea typeface="Cambria" pitchFamily="34" charset="-122"/>
+                <a:cs typeface="Cambria" pitchFamily="34" charset="-120"/>
+              </a:rPr>
+              <a:t>O material é meu mesmo?</a:t>
+            </a:r>
+            <a:endParaRPr lang="en-US" sz="1000" dirty="0"/>
+          </a:p>
+        </p:txBody>
+      </p:sp>
+      <p:sp>
+        <p:nvSpPr>
+          <p:cNvPr id="75" name="Text 73"/>
+          <p:cNvSpPr/>
+          <p:nvPr/>
+        </p:nvSpPr>
+        <p:spPr>
+          <a:xfrm>
+            <a:off x="7384032" y="4581144"/>
+            <a:ext cx="3051936" cy="310896"/>
+          </a:xfrm>
+          <a:prstGeom prst="rect">
+            <a:avLst/>
+          </a:prstGeom>
+          <a:noFill/>
+          <a:ln/>
+        </p:spPr>
+        <p:txBody>
+          <a:bodyPr wrap="square" lIns="0" tIns="0" rIns="0" bIns="0" rtlCol="0" anchor="t"/>
+          <a:lstStyle/>
+          <a:p>
+            <a:pPr indent="0" marL="0">
+              <a:lnSpc>
+                <a:spcPts val="1050"/>
+              </a:lnSpc>
+              <a:buNone/>
+            </a:pPr>
+            <a:r>
+              <a:rPr lang="en-US" sz="850" dirty="0">
+                <a:solidFill>
+                  <a:srgbClr val="5B6070"/>
+                </a:solidFill>
+                <a:latin typeface="Calibri" pitchFamily="34" charset="0"/>
+                <a:ea typeface="Calibri" pitchFamily="34" charset="-122"/>
+                <a:cs typeface="Calibri" pitchFamily="34" charset="-120"/>
+              </a:rPr>
+              <a:t>É. Você edita, imprime e usa como quiser, inclusive depois que o teste de sete dias acaba.</a:t>
+            </a:r>
+            <a:endParaRPr lang="en-US" sz="850" dirty="0"/>
+          </a:p>
+        </p:txBody>
+      </p:sp>
+      <p:sp>
+        <p:nvSpPr>
+          <p:cNvPr id="76" name="Text 74"/>
+          <p:cNvSpPr/>
+          <p:nvPr/>
+        </p:nvSpPr>
+        <p:spPr>
+          <a:xfrm>
+            <a:off x="7384032" y="4965192"/>
+            <a:ext cx="3051936" cy="164592"/>
+          </a:xfrm>
+          <a:prstGeom prst="rect">
+            <a:avLst/>
+          </a:prstGeom>
+          <a:noFill/>
+          <a:ln/>
+        </p:spPr>
+        <p:txBody>
+          <a:bodyPr wrap="square" lIns="0" tIns="0" rIns="0" bIns="0" rtlCol="0" anchor="ctr"/>
+          <a:lstStyle/>
+          <a:p>
+            <a:pPr indent="0" marL="0">
+              <a:buNone/>
+            </a:pPr>
+            <a:r>
+              <a:rPr lang="en-US" sz="1000" b="1" dirty="0">
+                <a:solidFill>
+                  <a:srgbClr val="180E4E"/>
+                </a:solidFill>
+                <a:latin typeface="Cambria" pitchFamily="34" charset="0"/>
+                <a:ea typeface="Cambria" pitchFamily="34" charset="-122"/>
+                <a:cs typeface="Cambria" pitchFamily="34" charset="-120"/>
+              </a:rPr>
+              <a:t>Serve para a minha disciplina?</a:t>
+            </a:r>
+            <a:endParaRPr lang="en-US" sz="1000" dirty="0"/>
+          </a:p>
+        </p:txBody>
+      </p:sp>
+      <p:sp>
+        <p:nvSpPr>
+          <p:cNvPr id="77" name="Text 75"/>
+          <p:cNvSpPr/>
+          <p:nvPr/>
+        </p:nvSpPr>
+        <p:spPr>
+          <a:xfrm>
+            <a:off x="7384032" y="5138928"/>
+            <a:ext cx="3051936" cy="201168"/>
+          </a:xfrm>
+          <a:prstGeom prst="rect">
+            <a:avLst/>
+          </a:prstGeom>
+          <a:noFill/>
+          <a:ln/>
+        </p:spPr>
+        <p:txBody>
+          <a:bodyPr wrap="square" lIns="0" tIns="0" rIns="0" bIns="0" rtlCol="0" anchor="t"/>
+          <a:lstStyle/>
+          <a:p>
+            <a:pPr indent="0" marL="0">
+              <a:lnSpc>
+                <a:spcPts val="1050"/>
+              </a:lnSpc>
+              <a:buNone/>
+            </a:pPr>
+            <a:r>
+              <a:rPr lang="en-US" sz="850" dirty="0">
+                <a:solidFill>
+                  <a:srgbClr val="5B6070"/>
+                </a:solidFill>
+                <a:latin typeface="Calibri" pitchFamily="34" charset="0"/>
+                <a:ea typeface="Calibri" pitchFamily="34" charset="-122"/>
+                <a:cs typeface="Calibri" pitchFamily="34" charset="-120"/>
+              </a:rPr>
+              <a:t>Da educação infantil ao ensino médio, em qualquer matéria.</a:t>
+            </a:r>
+            <a:endParaRPr lang="en-US" sz="850" dirty="0"/>
+          </a:p>
+        </p:txBody>
+      </p:sp>
+      <p:sp>
+        <p:nvSpPr>
+          <p:cNvPr id="78" name="Text 76"/>
+          <p:cNvSpPr/>
+          <p:nvPr/>
+        </p:nvSpPr>
+        <p:spPr>
+          <a:xfrm>
+            <a:off x="7384032" y="5413248"/>
+            <a:ext cx="3051936" cy="164592"/>
+          </a:xfrm>
+          <a:prstGeom prst="rect">
+            <a:avLst/>
+          </a:prstGeom>
+          <a:noFill/>
+          <a:ln/>
+        </p:spPr>
+        <p:txBody>
+          <a:bodyPr wrap="square" lIns="0" tIns="0" rIns="0" bIns="0" rtlCol="0" anchor="ctr"/>
+          <a:lstStyle/>
+          <a:p>
+            <a:pPr indent="0" marL="0">
+              <a:buNone/>
+            </a:pPr>
+            <a:r>
+              <a:rPr lang="en-US" sz="1000" b="1" dirty="0">
+                <a:solidFill>
+                  <a:srgbClr val="180E4E"/>
+                </a:solidFill>
+                <a:latin typeface="Cambria" pitchFamily="34" charset="0"/>
+                <a:ea typeface="Cambria" pitchFamily="34" charset="-122"/>
+                <a:cs typeface="Cambria" pitchFamily="34" charset="-120"/>
+              </a:rPr>
+              <a:t>Preciso de internet?</a:t>
+            </a:r>
+            <a:endParaRPr lang="en-US" sz="1000" dirty="0"/>
+          </a:p>
+        </p:txBody>
+      </p:sp>
+      <p:sp>
+        <p:nvSpPr>
+          <p:cNvPr id="79" name="Text 77"/>
+          <p:cNvSpPr/>
+          <p:nvPr/>
+        </p:nvSpPr>
+        <p:spPr>
+          <a:xfrm>
+            <a:off x="7384032" y="5586984"/>
+            <a:ext cx="3051936" cy="310896"/>
+          </a:xfrm>
+          <a:prstGeom prst="rect">
+            <a:avLst/>
+          </a:prstGeom>
+          <a:noFill/>
+          <a:ln/>
+        </p:spPr>
+        <p:txBody>
+          <a:bodyPr wrap="square" lIns="0" tIns="0" rIns="0" bIns="0" rtlCol="0" anchor="t"/>
+          <a:lstStyle/>
+          <a:p>
+            <a:pPr indent="0" marL="0">
+              <a:lnSpc>
+                <a:spcPts val="1050"/>
+              </a:lnSpc>
+              <a:buNone/>
+            </a:pPr>
+            <a:r>
+              <a:rPr lang="en-US" sz="850" dirty="0">
+                <a:solidFill>
+                  <a:srgbClr val="5B6070"/>
+                </a:solidFill>
+                <a:latin typeface="Calibri" pitchFamily="34" charset="0"/>
+                <a:ea typeface="Calibri" pitchFamily="34" charset="-122"/>
+                <a:cs typeface="Calibri" pitchFamily="34" charset="-120"/>
+              </a:rPr>
+              <a:t>Para montar o material, sim. Depois de baixar em Word ou PowerPoint, o arquivo abre sem internet.</a:t>
+            </a:r>
+            <a:endParaRPr lang="en-US" sz="850" dirty="0"/>
+          </a:p>
+        </p:txBody>
+      </p:sp>
+      <p:sp>
+        <p:nvSpPr>
+          <p:cNvPr id="80" name="Text 78"/>
+          <p:cNvSpPr/>
+          <p:nvPr/>
+        </p:nvSpPr>
+        <p:spPr>
+          <a:xfrm>
+            <a:off x="7384032" y="5971032"/>
+            <a:ext cx="3051936" cy="164592"/>
+          </a:xfrm>
+          <a:prstGeom prst="rect">
+            <a:avLst/>
+          </a:prstGeom>
+          <a:noFill/>
+          <a:ln/>
+        </p:spPr>
+        <p:txBody>
+          <a:bodyPr wrap="square" lIns="0" tIns="0" rIns="0" bIns="0" rtlCol="0" anchor="ctr"/>
+          <a:lstStyle/>
+          <a:p>
+            <a:pPr indent="0" marL="0">
+              <a:buNone/>
+            </a:pPr>
+            <a:r>
+              <a:rPr lang="en-US" sz="1000" b="1" dirty="0">
+                <a:solidFill>
+                  <a:srgbClr val="180E4E"/>
+                </a:solidFill>
+                <a:latin typeface="Cambria" pitchFamily="34" charset="0"/>
+                <a:ea typeface="Cambria" pitchFamily="34" charset="-122"/>
+                <a:cs typeface="Cambria" pitchFamily="34" charset="-120"/>
+              </a:rPr>
+              <a:t>E se eu não gostar?</a:t>
+            </a:r>
+            <a:endParaRPr lang="en-US" sz="1000" dirty="0"/>
+          </a:p>
+        </p:txBody>
+      </p:sp>
+      <p:sp>
+        <p:nvSpPr>
+          <p:cNvPr id="81" name="Text 79"/>
+          <p:cNvSpPr/>
+          <p:nvPr/>
+        </p:nvSpPr>
+        <p:spPr>
+          <a:xfrm>
+            <a:off x="7384032" y="6144768"/>
+            <a:ext cx="3051936" cy="310896"/>
+          </a:xfrm>
+          <a:prstGeom prst="rect">
+            <a:avLst/>
+          </a:prstGeom>
+          <a:noFill/>
+          <a:ln/>
+        </p:spPr>
+        <p:txBody>
+          <a:bodyPr wrap="square" lIns="0" tIns="0" rIns="0" bIns="0" rtlCol="0" anchor="t"/>
+          <a:lstStyle/>
+          <a:p>
+            <a:pPr indent="0" marL="0">
+              <a:lnSpc>
+                <a:spcPts val="1050"/>
+              </a:lnSpc>
+              <a:buNone/>
+            </a:pPr>
+            <a:r>
+              <a:rPr lang="en-US" sz="850" dirty="0">
+                <a:solidFill>
+                  <a:srgbClr val="5B6070"/>
+                </a:solidFill>
+                <a:latin typeface="Calibri" pitchFamily="34" charset="0"/>
+                <a:ea typeface="Calibri" pitchFamily="34" charset="-122"/>
+                <a:cs typeface="Calibri" pitchFamily="34" charset="-120"/>
+              </a:rPr>
+              <a:t>São sete dias grátis, sem cartão de crédito. Se não servir, é só não continuar. Nada é cobrado sozinho.</a:t>
+            </a:r>
+            <a:endParaRPr lang="en-US" sz="850" dirty="0"/>
+          </a:p>
+        </p:txBody>
+      </p:sp>
+      <p:sp>
+        <p:nvSpPr>
+          <p:cNvPr id="82" name="Text 80"/>
           <p:cNvSpPr/>
           <p:nvPr/>
         </p:nvSpPr>
         <p:spPr>
           <a:xfrm rot="-60000">
-            <a:off x="7721280" y="7102800"/>
-            <a:ext cx="2377440" cy="274320"/>
+            <a:off x="7767000" y="7102800"/>
+            <a:ext cx="2286000" cy="274320"/>
           </a:xfrm>
           <a:prstGeom prst="roundRect">
             <a:avLst>
